--- a/SwasthyaSetu_AI_Presentation.pptx
+++ b/SwasthyaSetu_AI_Presentation.pptx
@@ -13,6 +13,9 @@
     <p:sldId id="261" r:id="rId12"/>
     <p:sldId id="262" r:id="rId13"/>
     <p:sldId id="263" r:id="rId14"/>
+    <p:sldId id="264" r:id="rId15"/>
+    <p:sldId id="265" r:id="rId16"/>
+    <p:sldId id="266" r:id="rId17"/>
   </p:sldIdLst>
   <p:sldSz cx="12191695" cy="6858000" type="screen4x3"/>
   <p:notesSz cx="6858000" cy="9144000"/>
@@ -3146,8 +3149,8 @@
         </p:nvSpPr>
         <p:spPr>
           <a:xfrm>
-            <a:off x="731520" y="1097280"/>
-            <a:ext cx="137160" cy="2926080"/>
+            <a:off x="731520" y="1005840"/>
+            <a:ext cx="137160" cy="3108960"/>
           </a:xfrm>
           <a:prstGeom prst="rect">
             <a:avLst/>
@@ -3189,8 +3192,8 @@
         </p:nvSpPr>
         <p:spPr>
           <a:xfrm>
-            <a:off x="1097280" y="1005840"/>
-            <a:ext cx="10332720" cy="3200400"/>
+            <a:off x="1097280" y="914400"/>
+            <a:ext cx="10332720" cy="3291840"/>
           </a:xfrm>
           <a:prstGeom prst="rect">
             <a:avLst/>
@@ -3217,16 +3220,16 @@
           <a:p>
             <a:pPr>
               <a:spcBef>
-                <a:spcPts val="1200"/>
-              </a:spcBef>
-              <a:defRPr sz="2000" b="1">
+                <a:spcPts val="1000"/>
+              </a:spcBef>
+              <a:defRPr sz="1800" b="1">
                 <a:solidFill>
                   <a:srgbClr val="16A34A"/>
                 </a:solidFill>
               </a:defRPr>
             </a:pPr>
             <a:r>
-              <a:t>Federated AI Platform for National-Scale Health Resource &amp; Supply Chain Resilience</a:t>
+              <a:t>Federated AI Platform for National-Scale Health Resource &amp; Supply Chain Resilience across India's PHC Network &amp; Hospital Systems</a:t>
             </a:r>
           </a:p>
           <a:p>
@@ -3234,14 +3237,14 @@
               <a:spcBef>
                 <a:spcPts val="800"/>
               </a:spcBef>
-              <a:defRPr sz="1400">
+              <a:defRPr sz="1300">
                 <a:solidFill>
                   <a:srgbClr val="94A3B8"/>
                 </a:solidFill>
               </a:defRPr>
             </a:pPr>
             <a:r>
-              <a:t>Predictive Medicine Redistribution • Proximity Disease Outbreak Detection • Mass Casualty Tragedy Early Warning Radar</a:t>
+              <a:t>Predictive Redistribution • Proximity Disease Outbreak Radar • Hospital Resource Optimization • Mass Casualty Tragedy Early Warning</a:t>
             </a:r>
           </a:p>
         </p:txBody>
@@ -3254,8 +3257,8 @@
         </p:nvSpPr>
         <p:spPr>
           <a:xfrm>
-            <a:off x="1097280" y="4572000"/>
-            <a:ext cx="3108960" cy="1463040"/>
+            <a:off x="731520" y="4572000"/>
+            <a:ext cx="2560320" cy="1554480"/>
           </a:xfrm>
           <a:prstGeom prst="roundRect">
             <a:avLst/>
@@ -3299,8 +3302,8 @@
         </p:nvSpPr>
         <p:spPr>
           <a:xfrm>
-            <a:off x="1280160" y="4709160"/>
-            <a:ext cx="2743200" cy="1188720"/>
+            <a:off x="868680" y="4709160"/>
+            <a:ext cx="2286000" cy="1280160"/>
           </a:xfrm>
           <a:prstGeom prst="rect">
             <a:avLst/>
@@ -3314,7 +3317,7 @@
           <a:lstStyle/>
           <a:p>
             <a:pPr>
-              <a:defRPr sz="1600" b="1">
+              <a:defRPr sz="1400" b="1">
                 <a:solidFill>
                   <a:srgbClr val="DC2626"/>
                 </a:solidFill>
@@ -3326,7 +3329,10 @@
           </a:p>
           <a:p>
             <a:pPr>
-              <a:defRPr sz="1100">
+              <a:spcBef>
+                <a:spcPts val="400"/>
+              </a:spcBef>
+              <a:defRPr sz="1000">
                 <a:solidFill>
                   <a:srgbClr val="FFFFFF"/>
                 </a:solidFill>
@@ -3346,8 +3352,8 @@
         </p:nvSpPr>
         <p:spPr>
           <a:xfrm>
-            <a:off x="4480560" y="4572000"/>
-            <a:ext cx="3108960" cy="1463040"/>
+            <a:off x="3429000" y="4572000"/>
+            <a:ext cx="2560320" cy="1554480"/>
           </a:xfrm>
           <a:prstGeom prst="roundRect">
             <a:avLst/>
@@ -3391,8 +3397,8 @@
         </p:nvSpPr>
         <p:spPr>
           <a:xfrm>
-            <a:off x="4663440" y="4709160"/>
-            <a:ext cx="2743200" cy="1188720"/>
+            <a:off x="3566160" y="4709160"/>
+            <a:ext cx="2286000" cy="1280160"/>
           </a:xfrm>
           <a:prstGeom prst="rect">
             <a:avLst/>
@@ -3406,26 +3412,29 @@
           <a:lstStyle/>
           <a:p>
             <a:pPr>
-              <a:defRPr sz="1600" b="1">
+              <a:defRPr sz="1400" b="1">
                 <a:solidFill>
                   <a:srgbClr val="16A34A"/>
                 </a:solidFill>
               </a:defRPr>
             </a:pPr>
             <a:r>
-              <a:t>⚡ MILP P2P Redistribution</a:t>
-            </a:r>
-          </a:p>
-          <a:p>
-            <a:pPr>
-              <a:defRPr sz="1100">
-                <a:solidFill>
-                  <a:srgbClr val="FFFFFF"/>
-                </a:solidFill>
-              </a:defRPr>
-            </a:pPr>
-            <a:r>
-              <a:t>Algorithmic stock transfer within hours instead of 6-week state indents.</a:t>
+              <a:t>⚡ MILP Redistribution</a:t>
+            </a:r>
+          </a:p>
+          <a:p>
+            <a:pPr>
+              <a:spcBef>
+                <a:spcPts val="400"/>
+              </a:spcBef>
+              <a:defRPr sz="1000">
+                <a:solidFill>
+                  <a:srgbClr val="FFFFFF"/>
+                </a:solidFill>
+              </a:defRPr>
+            </a:pPr>
+            <a:r>
+              <a:t>Peer-to-peer stock transfer within hours vs. 6-week state indents.</a:t>
             </a:r>
           </a:p>
         </p:txBody>
@@ -3438,8 +3447,103 @@
         </p:nvSpPr>
         <p:spPr>
           <a:xfrm>
-            <a:off x="7863840" y="4572000"/>
-            <a:ext cx="3474720" cy="1463040"/>
+            <a:off x="6126480" y="4572000"/>
+            <a:ext cx="2560320" cy="1554480"/>
+          </a:xfrm>
+          <a:prstGeom prst="roundRect">
+            <a:avLst/>
+          </a:prstGeom>
+          <a:solidFill>
+            <a:srgbClr val="1E293B"/>
+          </a:solidFill>
+          <a:ln w="19050">
+            <a:solidFill>
+              <a:srgbClr val="2563EB"/>
+            </a:solidFill>
+          </a:ln>
+        </p:spPr>
+        <p:style>
+          <a:lnRef idx="1">
+            <a:schemeClr val="accent1"/>
+          </a:lnRef>
+          <a:fillRef idx="3">
+            <a:schemeClr val="accent1"/>
+          </a:fillRef>
+          <a:effectRef idx="2">
+            <a:schemeClr val="accent1"/>
+          </a:effectRef>
+          <a:fontRef idx="minor">
+            <a:schemeClr val="lt1"/>
+          </a:fontRef>
+        </p:style>
+        <p:txBody>
+          <a:bodyPr rtlCol="0" anchor="ctr"/>
+          <a:lstStyle/>
+          <a:p>
+            <a:pPr algn="ctr"/>
+          </a:p>
+        </p:txBody>
+      </p:sp>
+      <p:sp>
+        <p:nvSpPr>
+          <p:cNvPr id="10" name="TextBox 9"/>
+          <p:cNvSpPr txBox="1"/>
+          <p:nvPr/>
+        </p:nvSpPr>
+        <p:spPr>
+          <a:xfrm>
+            <a:off x="6263640" y="4709160"/>
+            <a:ext cx="2286000" cy="1280160"/>
+          </a:xfrm>
+          <a:prstGeom prst="rect">
+            <a:avLst/>
+          </a:prstGeom>
+          <a:noFill/>
+        </p:spPr>
+        <p:txBody>
+          <a:bodyPr wrap="square">
+            <a:spAutoFit/>
+          </a:bodyPr>
+          <a:lstStyle/>
+          <a:p>
+            <a:pPr>
+              <a:defRPr sz="1400" b="1">
+                <a:solidFill>
+                  <a:srgbClr val="2563EB"/>
+                </a:solidFill>
+              </a:defRPr>
+            </a:pPr>
+            <a:r>
+              <a:t>🏨 Hospital Optimizer</a:t>
+            </a:r>
+          </a:p>
+          <a:p>
+            <a:pPr>
+              <a:spcBef>
+                <a:spcPts val="400"/>
+              </a:spcBef>
+              <a:defRPr sz="1000">
+                <a:solidFill>
+                  <a:srgbClr val="FFFFFF"/>
+                </a:solidFill>
+              </a:defRPr>
+            </a:pPr>
+            <a:r>
+              <a:t>AI allocation for beds, ICU, surgical OTs, and staff rosters.</a:t>
+            </a:r>
+          </a:p>
+        </p:txBody>
+      </p:sp>
+      <p:sp>
+        <p:nvSpPr>
+          <p:cNvPr id="11" name="Rounded Rectangle 10"/>
+          <p:cNvSpPr/>
+          <p:nvPr/>
+        </p:nvSpPr>
+        <p:spPr>
+          <a:xfrm>
+            <a:off x="8823960" y="4572000"/>
+            <a:ext cx="2560320" cy="1554480"/>
           </a:xfrm>
           <a:prstGeom prst="roundRect">
             <a:avLst/>
@@ -3477,14 +3581,14 @@
       </p:sp>
       <p:sp>
         <p:nvSpPr>
-          <p:cNvPr id="10" name="TextBox 9"/>
+          <p:cNvPr id="12" name="TextBox 11"/>
           <p:cNvSpPr txBox="1"/>
           <p:nvPr/>
         </p:nvSpPr>
         <p:spPr>
           <a:xfrm>
-            <a:off x="8046720" y="4709160"/>
-            <a:ext cx="3108960" cy="1188720"/>
+            <a:off x="8961120" y="4709160"/>
+            <a:ext cx="2286000" cy="1280160"/>
           </a:xfrm>
           <a:prstGeom prst="rect">
             <a:avLst/>
@@ -3498,7 +3602,7 @@
           <a:lstStyle/>
           <a:p>
             <a:pPr>
-              <a:defRPr sz="1600" b="1">
+              <a:defRPr sz="1400" b="1">
                 <a:solidFill>
                   <a:srgbClr val="EA580C"/>
                 </a:solidFill>
@@ -3510,6 +3614,235 @@
           </a:p>
           <a:p>
             <a:pPr>
+              <a:spcBef>
+                <a:spcPts val="400"/>
+              </a:spcBef>
+              <a:defRPr sz="1000">
+                <a:solidFill>
+                  <a:srgbClr val="FFFFFF"/>
+                </a:solidFill>
+              </a:defRPr>
+            </a:pPr>
+            <a:r>
+              <a:t>DISHA / DPDP Act 2023 compliant federated learning across state nodes.</a:t>
+            </a:r>
+          </a:p>
+        </p:txBody>
+      </p:sp>
+    </p:spTree>
+  </p:cSld>
+  <p:clrMapOvr>
+    <a:masterClrMapping/>
+  </p:clrMapOvr>
+</p:sld>
+</file>
+
+<file path=ppt/slides/slide10.xml><?xml version="1.0" encoding="utf-8"?>
+<p:sld xmlns:a="http://schemas.openxmlformats.org/drawingml/2006/main" xmlns:p="http://schemas.openxmlformats.org/presentationml/2006/main" xmlns:r="http://schemas.openxmlformats.org/officeDocument/2006/relationships">
+  <p:cSld>
+    <p:spTree>
+      <p:nvGrpSpPr>
+        <p:cNvPr id="1" name=""/>
+        <p:cNvGrpSpPr/>
+        <p:nvPr/>
+      </p:nvGrpSpPr>
+      <p:grpSpPr/>
+      <p:sp>
+        <p:nvSpPr>
+          <p:cNvPr id="2" name="Rectangle 1"/>
+          <p:cNvSpPr/>
+          <p:nvPr/>
+        </p:nvSpPr>
+        <p:spPr>
+          <a:xfrm>
+            <a:off x="0" y="0"/>
+            <a:ext cx="12191695" cy="6858000"/>
+          </a:xfrm>
+          <a:prstGeom prst="rect">
+            <a:avLst/>
+          </a:prstGeom>
+          <a:solidFill>
+            <a:srgbClr val="0F172A"/>
+          </a:solidFill>
+          <a:ln>
+            <a:noFill/>
+          </a:ln>
+        </p:spPr>
+        <p:style>
+          <a:lnRef idx="1">
+            <a:schemeClr val="accent1"/>
+          </a:lnRef>
+          <a:fillRef idx="3">
+            <a:schemeClr val="accent1"/>
+          </a:fillRef>
+          <a:effectRef idx="2">
+            <a:schemeClr val="accent1"/>
+          </a:effectRef>
+          <a:fontRef idx="minor">
+            <a:schemeClr val="lt1"/>
+          </a:fontRef>
+        </p:style>
+        <p:txBody>
+          <a:bodyPr rtlCol="0" anchor="ctr"/>
+          <a:lstStyle/>
+          <a:p>
+            <a:pPr algn="ctr"/>
+          </a:p>
+        </p:txBody>
+      </p:sp>
+      <p:sp>
+        <p:nvSpPr>
+          <p:cNvPr id="3" name="TextBox 2"/>
+          <p:cNvSpPr txBox="1"/>
+          <p:nvPr/>
+        </p:nvSpPr>
+        <p:spPr>
+          <a:xfrm>
+            <a:off x="731520" y="365760"/>
+            <a:ext cx="10698480" cy="365760"/>
+          </a:xfrm>
+          <a:prstGeom prst="rect">
+            <a:avLst/>
+          </a:prstGeom>
+          <a:noFill/>
+        </p:spPr>
+        <p:txBody>
+          <a:bodyPr wrap="square">
+            <a:spAutoFit/>
+          </a:bodyPr>
+          <a:lstStyle/>
+          <a:p>
+            <a:pPr>
+              <a:defRPr sz="1100" b="1">
+                <a:solidFill>
+                  <a:srgbClr val="EA580C"/>
+                </a:solidFill>
+              </a:defRPr>
+            </a:pPr>
+            <a:r>
+              <a:t>TECHNOLOGY STACK</a:t>
+            </a:r>
+          </a:p>
+        </p:txBody>
+      </p:sp>
+      <p:sp>
+        <p:nvSpPr>
+          <p:cNvPr id="4" name="TextBox 3"/>
+          <p:cNvSpPr txBox="1"/>
+          <p:nvPr/>
+        </p:nvSpPr>
+        <p:spPr>
+          <a:xfrm>
+            <a:off x="731520" y="640080"/>
+            <a:ext cx="10698480" cy="731520"/>
+          </a:xfrm>
+          <a:prstGeom prst="rect">
+            <a:avLst/>
+          </a:prstGeom>
+          <a:noFill/>
+        </p:spPr>
+        <p:txBody>
+          <a:bodyPr wrap="square">
+            <a:spAutoFit/>
+          </a:bodyPr>
+          <a:lstStyle/>
+          <a:p>
+            <a:pPr>
+              <a:defRPr sz="2400" b="1">
+                <a:solidFill>
+                  <a:srgbClr val="FFFFFF"/>
+                </a:solidFill>
+              </a:defRPr>
+            </a:pPr>
+            <a:r>
+              <a:t>Full-Stack Technology Architecture &amp; Verification</a:t>
+            </a:r>
+          </a:p>
+        </p:txBody>
+      </p:sp>
+      <p:sp>
+        <p:nvSpPr>
+          <p:cNvPr id="5" name="Rounded Rectangle 4"/>
+          <p:cNvSpPr/>
+          <p:nvPr/>
+        </p:nvSpPr>
+        <p:spPr>
+          <a:xfrm>
+            <a:off x="731520" y="1645920"/>
+            <a:ext cx="5120640" cy="2011680"/>
+          </a:xfrm>
+          <a:prstGeom prst="roundRect">
+            <a:avLst/>
+          </a:prstGeom>
+          <a:solidFill>
+            <a:srgbClr val="1E293B"/>
+          </a:solidFill>
+          <a:ln w="19050">
+            <a:solidFill>
+              <a:srgbClr val="16A34A"/>
+            </a:solidFill>
+          </a:ln>
+        </p:spPr>
+        <p:style>
+          <a:lnRef idx="1">
+            <a:schemeClr val="accent1"/>
+          </a:lnRef>
+          <a:fillRef idx="3">
+            <a:schemeClr val="accent1"/>
+          </a:fillRef>
+          <a:effectRef idx="2">
+            <a:schemeClr val="accent1"/>
+          </a:effectRef>
+          <a:fontRef idx="minor">
+            <a:schemeClr val="lt1"/>
+          </a:fontRef>
+        </p:style>
+        <p:txBody>
+          <a:bodyPr rtlCol="0" anchor="ctr"/>
+          <a:lstStyle/>
+          <a:p>
+            <a:pPr algn="ctr"/>
+          </a:p>
+        </p:txBody>
+      </p:sp>
+      <p:sp>
+        <p:nvSpPr>
+          <p:cNvPr id="6" name="TextBox 5"/>
+          <p:cNvSpPr txBox="1"/>
+          <p:nvPr/>
+        </p:nvSpPr>
+        <p:spPr>
+          <a:xfrm>
+            <a:off x="914400" y="1783080"/>
+            <a:ext cx="4754880" cy="1737360"/>
+          </a:xfrm>
+          <a:prstGeom prst="rect">
+            <a:avLst/>
+          </a:prstGeom>
+          <a:noFill/>
+        </p:spPr>
+        <p:txBody>
+          <a:bodyPr wrap="square">
+            <a:spAutoFit/>
+          </a:bodyPr>
+          <a:lstStyle/>
+          <a:p>
+            <a:pPr>
+              <a:defRPr sz="1500" b="1">
+                <a:solidFill>
+                  <a:srgbClr val="16A34A"/>
+                </a:solidFill>
+              </a:defRPr>
+            </a:pPr>
+            <a:r>
+              <a:t>🎨 Frontend Tier</a:t>
+            </a:r>
+          </a:p>
+          <a:p>
+            <a:pPr>
+              <a:spcBef>
+                <a:spcPts val="200"/>
+              </a:spcBef>
               <a:defRPr sz="1100">
                 <a:solidFill>
                   <a:srgbClr val="FFFFFF"/>
@@ -3517,7 +3850,1093 @@
               </a:defRPr>
             </a:pPr>
             <a:r>
-              <a:t>DISHA / DPDP compliant federated learning across state nodes.</a:t>
+              <a:t>• React 18 + Vite SPA</a:t>
+            </a:r>
+          </a:p>
+          <a:p>
+            <a:pPr>
+              <a:spcBef>
+                <a:spcPts val="200"/>
+              </a:spcBef>
+              <a:defRPr sz="1100">
+                <a:solidFill>
+                  <a:srgbClr val="FFFFFF"/>
+                </a:solidFill>
+              </a:defRPr>
+            </a:pPr>
+            <a:r>
+              <a:t>• Clean Glassmorphism UI</a:t>
+            </a:r>
+          </a:p>
+          <a:p>
+            <a:pPr>
+              <a:spcBef>
+                <a:spcPts val="200"/>
+              </a:spcBef>
+              <a:defRPr sz="1100">
+                <a:solidFill>
+                  <a:srgbClr val="FFFFFF"/>
+                </a:solidFill>
+              </a:defRPr>
+            </a:pPr>
+            <a:r>
+              <a:t>• Lucide Icons + Leaflet Maps</a:t>
+            </a:r>
+          </a:p>
+          <a:p>
+            <a:pPr>
+              <a:spcBef>
+                <a:spcPts val="200"/>
+              </a:spcBef>
+              <a:defRPr sz="1100">
+                <a:solidFill>
+                  <a:srgbClr val="FFFFFF"/>
+                </a:solidFill>
+              </a:defRPr>
+            </a:pPr>
+            <a:r>
+              <a:t>• 11 Regional Languages i18n</a:t>
+            </a:r>
+          </a:p>
+          <a:p>
+            <a:pPr>
+              <a:spcBef>
+                <a:spcPts val="200"/>
+              </a:spcBef>
+              <a:defRPr sz="1100">
+                <a:solidFill>
+                  <a:srgbClr val="FFFFFF"/>
+                </a:solidFill>
+              </a:defRPr>
+            </a:pPr>
+            <a:r>
+              <a:t>• PortalSidebar &amp; Guide Banners</a:t>
+            </a:r>
+          </a:p>
+        </p:txBody>
+      </p:sp>
+      <p:sp>
+        <p:nvSpPr>
+          <p:cNvPr id="7" name="Rounded Rectangle 6"/>
+          <p:cNvSpPr/>
+          <p:nvPr/>
+        </p:nvSpPr>
+        <p:spPr>
+          <a:xfrm>
+            <a:off x="6126480" y="1645920"/>
+            <a:ext cx="5120640" cy="2011680"/>
+          </a:xfrm>
+          <a:prstGeom prst="roundRect">
+            <a:avLst/>
+          </a:prstGeom>
+          <a:solidFill>
+            <a:srgbClr val="1E293B"/>
+          </a:solidFill>
+          <a:ln w="19050">
+            <a:solidFill>
+              <a:srgbClr val="16A34A"/>
+            </a:solidFill>
+          </a:ln>
+        </p:spPr>
+        <p:style>
+          <a:lnRef idx="1">
+            <a:schemeClr val="accent1"/>
+          </a:lnRef>
+          <a:fillRef idx="3">
+            <a:schemeClr val="accent1"/>
+          </a:fillRef>
+          <a:effectRef idx="2">
+            <a:schemeClr val="accent1"/>
+          </a:effectRef>
+          <a:fontRef idx="minor">
+            <a:schemeClr val="lt1"/>
+          </a:fontRef>
+        </p:style>
+        <p:txBody>
+          <a:bodyPr rtlCol="0" anchor="ctr"/>
+          <a:lstStyle/>
+          <a:p>
+            <a:pPr algn="ctr"/>
+          </a:p>
+        </p:txBody>
+      </p:sp>
+      <p:sp>
+        <p:nvSpPr>
+          <p:cNvPr id="8" name="TextBox 7"/>
+          <p:cNvSpPr txBox="1"/>
+          <p:nvPr/>
+        </p:nvSpPr>
+        <p:spPr>
+          <a:xfrm>
+            <a:off x="6309360" y="1783080"/>
+            <a:ext cx="4754880" cy="1737360"/>
+          </a:xfrm>
+          <a:prstGeom prst="rect">
+            <a:avLst/>
+          </a:prstGeom>
+          <a:noFill/>
+        </p:spPr>
+        <p:txBody>
+          <a:bodyPr wrap="square">
+            <a:spAutoFit/>
+          </a:bodyPr>
+          <a:lstStyle/>
+          <a:p>
+            <a:pPr>
+              <a:defRPr sz="1500" b="1">
+                <a:solidFill>
+                  <a:srgbClr val="16A34A"/>
+                </a:solidFill>
+              </a:defRPr>
+            </a:pPr>
+            <a:r>
+              <a:t>⚙️ Backend Core</a:t>
+            </a:r>
+          </a:p>
+          <a:p>
+            <a:pPr>
+              <a:spcBef>
+                <a:spcPts val="200"/>
+              </a:spcBef>
+              <a:defRPr sz="1100">
+                <a:solidFill>
+                  <a:srgbClr val="FFFFFF"/>
+                </a:solidFill>
+              </a:defRPr>
+            </a:pPr>
+            <a:r>
+              <a:t>• FastAPI (Python 3.10+)</a:t>
+            </a:r>
+          </a:p>
+          <a:p>
+            <a:pPr>
+              <a:spcBef>
+                <a:spcPts val="200"/>
+              </a:spcBef>
+              <a:defRPr sz="1100">
+                <a:solidFill>
+                  <a:srgbClr val="FFFFFF"/>
+                </a:solidFill>
+              </a:defRPr>
+            </a:pPr>
+            <a:r>
+              <a:t>• SQLAlchemy ORM + SQLite/PG</a:t>
+            </a:r>
+          </a:p>
+          <a:p>
+            <a:pPr>
+              <a:spcBef>
+                <a:spcPts val="200"/>
+              </a:spcBef>
+              <a:defRPr sz="1100">
+                <a:solidFill>
+                  <a:srgbClr val="FFFFFF"/>
+                </a:solidFill>
+              </a:defRPr>
+            </a:pPr>
+            <a:r>
+              <a:t>• Pydantic Request Schemas</a:t>
+            </a:r>
+          </a:p>
+          <a:p>
+            <a:pPr>
+              <a:spcBef>
+                <a:spcPts val="200"/>
+              </a:spcBef>
+              <a:defRPr sz="1100">
+                <a:solidFill>
+                  <a:srgbClr val="FFFFFF"/>
+                </a:solidFill>
+              </a:defRPr>
+            </a:pPr>
+            <a:r>
+              <a:t>• Uvicorn Async Worker</a:t>
+            </a:r>
+          </a:p>
+          <a:p>
+            <a:pPr>
+              <a:spcBef>
+                <a:spcPts val="200"/>
+              </a:spcBef>
+              <a:defRPr sz="1100">
+                <a:solidFill>
+                  <a:srgbClr val="FFFFFF"/>
+                </a:solidFill>
+              </a:defRPr>
+            </a:pPr>
+            <a:r>
+              <a:t>• 25+ REST API Endpoints</a:t>
+            </a:r>
+          </a:p>
+        </p:txBody>
+      </p:sp>
+      <p:sp>
+        <p:nvSpPr>
+          <p:cNvPr id="9" name="Rounded Rectangle 8"/>
+          <p:cNvSpPr/>
+          <p:nvPr/>
+        </p:nvSpPr>
+        <p:spPr>
+          <a:xfrm>
+            <a:off x="731520" y="3931920"/>
+            <a:ext cx="5120640" cy="2011680"/>
+          </a:xfrm>
+          <a:prstGeom prst="roundRect">
+            <a:avLst/>
+          </a:prstGeom>
+          <a:solidFill>
+            <a:srgbClr val="1E293B"/>
+          </a:solidFill>
+          <a:ln w="19050">
+            <a:solidFill>
+              <a:srgbClr val="EA580C"/>
+            </a:solidFill>
+          </a:ln>
+        </p:spPr>
+        <p:style>
+          <a:lnRef idx="1">
+            <a:schemeClr val="accent1"/>
+          </a:lnRef>
+          <a:fillRef idx="3">
+            <a:schemeClr val="accent1"/>
+          </a:fillRef>
+          <a:effectRef idx="2">
+            <a:schemeClr val="accent1"/>
+          </a:effectRef>
+          <a:fontRef idx="minor">
+            <a:schemeClr val="lt1"/>
+          </a:fontRef>
+        </p:style>
+        <p:txBody>
+          <a:bodyPr rtlCol="0" anchor="ctr"/>
+          <a:lstStyle/>
+          <a:p>
+            <a:pPr algn="ctr"/>
+          </a:p>
+        </p:txBody>
+      </p:sp>
+      <p:sp>
+        <p:nvSpPr>
+          <p:cNvPr id="10" name="TextBox 9"/>
+          <p:cNvSpPr txBox="1"/>
+          <p:nvPr/>
+        </p:nvSpPr>
+        <p:spPr>
+          <a:xfrm>
+            <a:off x="914400" y="4069080"/>
+            <a:ext cx="4754880" cy="1737360"/>
+          </a:xfrm>
+          <a:prstGeom prst="rect">
+            <a:avLst/>
+          </a:prstGeom>
+          <a:noFill/>
+        </p:spPr>
+        <p:txBody>
+          <a:bodyPr wrap="square">
+            <a:spAutoFit/>
+          </a:bodyPr>
+          <a:lstStyle/>
+          <a:p>
+            <a:pPr>
+              <a:defRPr sz="1500" b="1">
+                <a:solidFill>
+                  <a:srgbClr val="EA580C"/>
+                </a:solidFill>
+              </a:defRPr>
+            </a:pPr>
+            <a:r>
+              <a:t>🧠 AI &amp; Optimization</a:t>
+            </a:r>
+          </a:p>
+          <a:p>
+            <a:pPr>
+              <a:spcBef>
+                <a:spcPts val="200"/>
+              </a:spcBef>
+              <a:defRPr sz="1100">
+                <a:solidFill>
+                  <a:srgbClr val="FFFFFF"/>
+                </a:solidFill>
+              </a:defRPr>
+            </a:pPr>
+            <a:r>
+              <a:t>• PuLP MILP Linear Optimizer</a:t>
+            </a:r>
+          </a:p>
+          <a:p>
+            <a:pPr>
+              <a:spcBef>
+                <a:spcPts val="200"/>
+              </a:spcBef>
+              <a:defRPr sz="1100">
+                <a:solidFill>
+                  <a:srgbClr val="FFFFFF"/>
+                </a:solidFill>
+              </a:defRPr>
+            </a:pPr>
+            <a:r>
+              <a:t>• Google OR-Tools CP-SAT</a:t>
+            </a:r>
+          </a:p>
+          <a:p>
+            <a:pPr>
+              <a:spcBef>
+                <a:spcPts val="200"/>
+              </a:spcBef>
+              <a:defRPr sz="1100">
+                <a:solidFill>
+                  <a:srgbClr val="FFFFFF"/>
+                </a:solidFill>
+              </a:defRPr>
+            </a:pPr>
+            <a:r>
+              <a:t>• Prophet + XGBoost Demand Models</a:t>
+            </a:r>
+          </a:p>
+          <a:p>
+            <a:pPr>
+              <a:spcBef>
+                <a:spcPts val="200"/>
+              </a:spcBef>
+              <a:defRPr sz="1100">
+                <a:solidFill>
+                  <a:srgbClr val="FFFFFF"/>
+                </a:solidFill>
+              </a:defRPr>
+            </a:pPr>
+            <a:r>
+              <a:t>• Haversine Geospatial Vectors</a:t>
+            </a:r>
+          </a:p>
+          <a:p>
+            <a:pPr>
+              <a:spcBef>
+                <a:spcPts val="200"/>
+              </a:spcBef>
+              <a:defRPr sz="1100">
+                <a:solidFill>
+                  <a:srgbClr val="FFFFFF"/>
+                </a:solidFill>
+              </a:defRPr>
+            </a:pPr>
+            <a:r>
+              <a:t>• Flower-Compatible FedAvg</a:t>
+            </a:r>
+          </a:p>
+        </p:txBody>
+      </p:sp>
+      <p:sp>
+        <p:nvSpPr>
+          <p:cNvPr id="11" name="Rounded Rectangle 10"/>
+          <p:cNvSpPr/>
+          <p:nvPr/>
+        </p:nvSpPr>
+        <p:spPr>
+          <a:xfrm>
+            <a:off x="6126480" y="3931920"/>
+            <a:ext cx="5120640" cy="2011680"/>
+          </a:xfrm>
+          <a:prstGeom prst="roundRect">
+            <a:avLst/>
+          </a:prstGeom>
+          <a:solidFill>
+            <a:srgbClr val="1E293B"/>
+          </a:solidFill>
+          <a:ln w="19050">
+            <a:solidFill>
+              <a:srgbClr val="EA580C"/>
+            </a:solidFill>
+          </a:ln>
+        </p:spPr>
+        <p:style>
+          <a:lnRef idx="1">
+            <a:schemeClr val="accent1"/>
+          </a:lnRef>
+          <a:fillRef idx="3">
+            <a:schemeClr val="accent1"/>
+          </a:fillRef>
+          <a:effectRef idx="2">
+            <a:schemeClr val="accent1"/>
+          </a:effectRef>
+          <a:fontRef idx="minor">
+            <a:schemeClr val="lt1"/>
+          </a:fontRef>
+        </p:style>
+        <p:txBody>
+          <a:bodyPr rtlCol="0" anchor="ctr"/>
+          <a:lstStyle/>
+          <a:p>
+            <a:pPr algn="ctr"/>
+          </a:p>
+        </p:txBody>
+      </p:sp>
+      <p:sp>
+        <p:nvSpPr>
+          <p:cNvPr id="12" name="TextBox 11"/>
+          <p:cNvSpPr txBox="1"/>
+          <p:nvPr/>
+        </p:nvSpPr>
+        <p:spPr>
+          <a:xfrm>
+            <a:off x="6309360" y="4069080"/>
+            <a:ext cx="4754880" cy="1737360"/>
+          </a:xfrm>
+          <a:prstGeom prst="rect">
+            <a:avLst/>
+          </a:prstGeom>
+          <a:noFill/>
+        </p:spPr>
+        <p:txBody>
+          <a:bodyPr wrap="square">
+            <a:spAutoFit/>
+          </a:bodyPr>
+          <a:lstStyle/>
+          <a:p>
+            <a:pPr>
+              <a:defRPr sz="1500" b="1">
+                <a:solidFill>
+                  <a:srgbClr val="EA580C"/>
+                </a:solidFill>
+              </a:defRPr>
+            </a:pPr>
+            <a:r>
+              <a:t>📦 Edge &amp; Standards</a:t>
+            </a:r>
+          </a:p>
+          <a:p>
+            <a:pPr>
+              <a:spcBef>
+                <a:spcPts val="200"/>
+              </a:spcBef>
+              <a:defRPr sz="1100">
+                <a:solidFill>
+                  <a:srgbClr val="FFFFFF"/>
+                </a:solidFill>
+              </a:defRPr>
+            </a:pPr>
+            <a:r>
+              <a:t>• IndexedDB / LocalStorage Sync</a:t>
+            </a:r>
+          </a:p>
+          <a:p>
+            <a:pPr>
+              <a:spcBef>
+                <a:spcPts val="200"/>
+              </a:spcBef>
+              <a:defRPr sz="1100">
+                <a:solidFill>
+                  <a:srgbClr val="FFFFFF"/>
+                </a:solidFill>
+              </a:defRPr>
+            </a:pPr>
+            <a:r>
+              <a:t>• ABDM Facility Registry M1-M3</a:t>
+            </a:r>
+          </a:p>
+          <a:p>
+            <a:pPr>
+              <a:spcBef>
+                <a:spcPts val="200"/>
+              </a:spcBef>
+              <a:defRPr sz="1100">
+                <a:solidFill>
+                  <a:srgbClr val="FFFFFF"/>
+                </a:solidFill>
+              </a:defRPr>
+            </a:pPr>
+            <a:r>
+              <a:t>• eVIN IoT Cold-Chain Ingestion</a:t>
+            </a:r>
+          </a:p>
+          <a:p>
+            <a:pPr>
+              <a:spcBef>
+                <a:spcPts val="200"/>
+              </a:spcBef>
+              <a:defRPr sz="1100">
+                <a:solidFill>
+                  <a:srgbClr val="FFFFFF"/>
+                </a:solidFill>
+              </a:defRPr>
+            </a:pPr>
+            <a:r>
+              <a:t>• HMIS Disease Data Ingestion</a:t>
+            </a:r>
+          </a:p>
+          <a:p>
+            <a:pPr>
+              <a:spcBef>
+                <a:spcPts val="200"/>
+              </a:spcBef>
+              <a:defRPr sz="1100">
+                <a:solidFill>
+                  <a:srgbClr val="FFFFFF"/>
+                </a:solidFill>
+              </a:defRPr>
+            </a:pPr>
+            <a:r>
+              <a:t>• 5-Phase System Verification Suite</a:t>
+            </a:r>
+          </a:p>
+        </p:txBody>
+      </p:sp>
+    </p:spTree>
+  </p:cSld>
+  <p:clrMapOvr>
+    <a:masterClrMapping/>
+  </p:clrMapOvr>
+</p:sld>
+</file>
+
+<file path=ppt/slides/slide11.xml><?xml version="1.0" encoding="utf-8"?>
+<p:sld xmlns:a="http://schemas.openxmlformats.org/drawingml/2006/main" xmlns:p="http://schemas.openxmlformats.org/presentationml/2006/main" xmlns:r="http://schemas.openxmlformats.org/officeDocument/2006/relationships">
+  <p:cSld>
+    <p:spTree>
+      <p:nvGrpSpPr>
+        <p:cNvPr id="1" name=""/>
+        <p:cNvGrpSpPr/>
+        <p:nvPr/>
+      </p:nvGrpSpPr>
+      <p:grpSpPr/>
+      <p:sp>
+        <p:nvSpPr>
+          <p:cNvPr id="2" name="Rectangle 1"/>
+          <p:cNvSpPr/>
+          <p:nvPr/>
+        </p:nvSpPr>
+        <p:spPr>
+          <a:xfrm>
+            <a:off x="0" y="0"/>
+            <a:ext cx="12191695" cy="6858000"/>
+          </a:xfrm>
+          <a:prstGeom prst="rect">
+            <a:avLst/>
+          </a:prstGeom>
+          <a:solidFill>
+            <a:srgbClr val="0F172A"/>
+          </a:solidFill>
+          <a:ln>
+            <a:noFill/>
+          </a:ln>
+        </p:spPr>
+        <p:style>
+          <a:lnRef idx="1">
+            <a:schemeClr val="accent1"/>
+          </a:lnRef>
+          <a:fillRef idx="3">
+            <a:schemeClr val="accent1"/>
+          </a:fillRef>
+          <a:effectRef idx="2">
+            <a:schemeClr val="accent1"/>
+          </a:effectRef>
+          <a:fontRef idx="minor">
+            <a:schemeClr val="lt1"/>
+          </a:fontRef>
+        </p:style>
+        <p:txBody>
+          <a:bodyPr rtlCol="0" anchor="ctr"/>
+          <a:lstStyle/>
+          <a:p>
+            <a:pPr algn="ctr"/>
+          </a:p>
+        </p:txBody>
+      </p:sp>
+      <p:sp>
+        <p:nvSpPr>
+          <p:cNvPr id="3" name="TextBox 2"/>
+          <p:cNvSpPr txBox="1"/>
+          <p:nvPr/>
+        </p:nvSpPr>
+        <p:spPr>
+          <a:xfrm>
+            <a:off x="731520" y="365760"/>
+            <a:ext cx="10698480" cy="365760"/>
+          </a:xfrm>
+          <a:prstGeom prst="rect">
+            <a:avLst/>
+          </a:prstGeom>
+          <a:noFill/>
+        </p:spPr>
+        <p:txBody>
+          <a:bodyPr wrap="square">
+            <a:spAutoFit/>
+          </a:bodyPr>
+          <a:lstStyle/>
+          <a:p>
+            <a:pPr>
+              <a:defRPr sz="1100" b="1">
+                <a:solidFill>
+                  <a:srgbClr val="EA580C"/>
+                </a:solidFill>
+              </a:defRPr>
+            </a:pPr>
+            <a:r>
+              <a:t>CONCLUSION &amp; DEMO</a:t>
+            </a:r>
+          </a:p>
+        </p:txBody>
+      </p:sp>
+      <p:sp>
+        <p:nvSpPr>
+          <p:cNvPr id="4" name="TextBox 3"/>
+          <p:cNvSpPr txBox="1"/>
+          <p:nvPr/>
+        </p:nvSpPr>
+        <p:spPr>
+          <a:xfrm>
+            <a:off x="731520" y="640080"/>
+            <a:ext cx="10698480" cy="731520"/>
+          </a:xfrm>
+          <a:prstGeom prst="rect">
+            <a:avLst/>
+          </a:prstGeom>
+          <a:noFill/>
+        </p:spPr>
+        <p:txBody>
+          <a:bodyPr wrap="square">
+            <a:spAutoFit/>
+          </a:bodyPr>
+          <a:lstStyle/>
+          <a:p>
+            <a:pPr>
+              <a:defRPr sz="2400" b="1">
+                <a:solidFill>
+                  <a:srgbClr val="FFFFFF"/>
+                </a:solidFill>
+              </a:defRPr>
+            </a:pPr>
+            <a:r>
+              <a:t>Project Links, Source Code &amp; Development Team</a:t>
+            </a:r>
+          </a:p>
+        </p:txBody>
+      </p:sp>
+      <p:sp>
+        <p:nvSpPr>
+          <p:cNvPr id="5" name="Rounded Rectangle 4"/>
+          <p:cNvSpPr/>
+          <p:nvPr/>
+        </p:nvSpPr>
+        <p:spPr>
+          <a:xfrm>
+            <a:off x="731520" y="1645920"/>
+            <a:ext cx="5120640" cy="4389120"/>
+          </a:xfrm>
+          <a:prstGeom prst="roundRect">
+            <a:avLst/>
+          </a:prstGeom>
+          <a:solidFill>
+            <a:srgbClr val="1E293B"/>
+          </a:solidFill>
+          <a:ln w="19050">
+            <a:solidFill>
+              <a:srgbClr val="16A34A"/>
+            </a:solidFill>
+          </a:ln>
+        </p:spPr>
+        <p:style>
+          <a:lnRef idx="1">
+            <a:schemeClr val="accent1"/>
+          </a:lnRef>
+          <a:fillRef idx="3">
+            <a:schemeClr val="accent1"/>
+          </a:fillRef>
+          <a:effectRef idx="2">
+            <a:schemeClr val="accent1"/>
+          </a:effectRef>
+          <a:fontRef idx="minor">
+            <a:schemeClr val="lt1"/>
+          </a:fontRef>
+        </p:style>
+        <p:txBody>
+          <a:bodyPr rtlCol="0" anchor="ctr"/>
+          <a:lstStyle/>
+          <a:p>
+            <a:pPr algn="ctr"/>
+          </a:p>
+        </p:txBody>
+      </p:sp>
+      <p:sp>
+        <p:nvSpPr>
+          <p:cNvPr id="6" name="TextBox 5"/>
+          <p:cNvSpPr txBox="1"/>
+          <p:nvPr/>
+        </p:nvSpPr>
+        <p:spPr>
+          <a:xfrm>
+            <a:off x="914400" y="1828800"/>
+            <a:ext cx="4754880" cy="4023360"/>
+          </a:xfrm>
+          <a:prstGeom prst="rect">
+            <a:avLst/>
+          </a:prstGeom>
+          <a:noFill/>
+        </p:spPr>
+        <p:txBody>
+          <a:bodyPr wrap="square">
+            <a:spAutoFit/>
+          </a:bodyPr>
+          <a:lstStyle/>
+          <a:p>
+            <a:pPr>
+              <a:defRPr sz="1800" b="1">
+                <a:solidFill>
+                  <a:srgbClr val="16A34A"/>
+                </a:solidFill>
+              </a:defRPr>
+            </a:pPr>
+            <a:r>
+              <a:t>👥 Core Development Team</a:t>
+            </a:r>
+          </a:p>
+          <a:p>
+            <a:pPr>
+              <a:spcBef>
+                <a:spcPts val="800"/>
+              </a:spcBef>
+              <a:defRPr sz="1300" b="1">
+                <a:solidFill>
+                  <a:srgbClr val="FFFFFF"/>
+                </a:solidFill>
+              </a:defRPr>
+            </a:pPr>
+            <a:r>
+              <a:t>• Rudra Pratap Chaurasiya (CSJMU Kanpur)</a:t>
+            </a:r>
+          </a:p>
+          <a:p>
+            <a:pPr>
+              <a:defRPr sz="1100">
+                <a:solidFill>
+                  <a:srgbClr val="94A3B8"/>
+                </a:solidFill>
+              </a:defRPr>
+            </a:pPr>
+            <a:r>
+              <a:t>  Role: Lead Full Stack AI Architecture &amp; ML Engines</a:t>
+            </a:r>
+          </a:p>
+        </p:txBody>
+      </p:sp>
+      <p:sp>
+        <p:nvSpPr>
+          <p:cNvPr id="7" name="Rounded Rectangle 6"/>
+          <p:cNvSpPr/>
+          <p:nvPr/>
+        </p:nvSpPr>
+        <p:spPr>
+          <a:xfrm>
+            <a:off x="6217920" y="1645920"/>
+            <a:ext cx="5212080" cy="4389120"/>
+          </a:xfrm>
+          <a:prstGeom prst="roundRect">
+            <a:avLst/>
+          </a:prstGeom>
+          <a:solidFill>
+            <a:srgbClr val="1E293B"/>
+          </a:solidFill>
+          <a:ln w="19050">
+            <a:solidFill>
+              <a:srgbClr val="EA580C"/>
+            </a:solidFill>
+          </a:ln>
+        </p:spPr>
+        <p:style>
+          <a:lnRef idx="1">
+            <a:schemeClr val="accent1"/>
+          </a:lnRef>
+          <a:fillRef idx="3">
+            <a:schemeClr val="accent1"/>
+          </a:fillRef>
+          <a:effectRef idx="2">
+            <a:schemeClr val="accent1"/>
+          </a:effectRef>
+          <a:fontRef idx="minor">
+            <a:schemeClr val="lt1"/>
+          </a:fontRef>
+        </p:style>
+        <p:txBody>
+          <a:bodyPr rtlCol="0" anchor="ctr"/>
+          <a:lstStyle/>
+          <a:p>
+            <a:pPr algn="ctr"/>
+          </a:p>
+        </p:txBody>
+      </p:sp>
+      <p:sp>
+        <p:nvSpPr>
+          <p:cNvPr id="8" name="TextBox 7"/>
+          <p:cNvSpPr txBox="1"/>
+          <p:nvPr/>
+        </p:nvSpPr>
+        <p:spPr>
+          <a:xfrm>
+            <a:off x="6400800" y="1828800"/>
+            <a:ext cx="4846320" cy="4023360"/>
+          </a:xfrm>
+          <a:prstGeom prst="rect">
+            <a:avLst/>
+          </a:prstGeom>
+          <a:noFill/>
+        </p:spPr>
+        <p:txBody>
+          <a:bodyPr wrap="square">
+            <a:spAutoFit/>
+          </a:bodyPr>
+          <a:lstStyle/>
+          <a:p>
+            <a:pPr>
+              <a:defRPr sz="1800" b="1">
+                <a:solidFill>
+                  <a:srgbClr val="EA580C"/>
+                </a:solidFill>
+              </a:defRPr>
+            </a:pPr>
+            <a:r>
+              <a:t>🔗 Live Demonstration Portals &amp; Links</a:t>
+            </a:r>
+          </a:p>
+          <a:p>
+            <a:pPr>
+              <a:spcBef>
+                <a:spcPts val="300"/>
+              </a:spcBef>
+              <a:defRPr sz="1000" b="1">
+                <a:solidFill>
+                  <a:srgbClr val="FFFFFF"/>
+                </a:solidFill>
+              </a:defRPr>
+            </a:pPr>
+            <a:r>
+              <a:t>• GitHub Repository:</a:t>
+            </a:r>
+          </a:p>
+          <a:p>
+            <a:pPr>
+              <a:defRPr sz="900">
+                <a:solidFill>
+                  <a:srgbClr val="16A34A"/>
+                </a:solidFill>
+              </a:defRPr>
+            </a:pPr>
+            <a:r>
+              <a:t>  https://github.com/rudraa0604/Swasthya-Setu-AI</a:t>
+            </a:r>
+          </a:p>
+          <a:p>
+            <a:pPr>
+              <a:spcBef>
+                <a:spcPts val="300"/>
+              </a:spcBef>
+              <a:defRPr sz="1000" b="1">
+                <a:solidFill>
+                  <a:srgbClr val="FFFFFF"/>
+                </a:solidFill>
+              </a:defRPr>
+            </a:pPr>
+            <a:r>
+              <a:t>• Local Web App:</a:t>
+            </a:r>
+          </a:p>
+          <a:p>
+            <a:pPr>
+              <a:defRPr sz="900">
+                <a:solidFill>
+                  <a:srgbClr val="16A34A"/>
+                </a:solidFill>
+              </a:defRPr>
+            </a:pPr>
+            <a:r>
+              <a:t>  http://localhost:3000</a:t>
+            </a:r>
+          </a:p>
+          <a:p>
+            <a:pPr>
+              <a:spcBef>
+                <a:spcPts val="300"/>
+              </a:spcBef>
+              <a:defRPr sz="1000" b="1">
+                <a:solidFill>
+                  <a:srgbClr val="FFFFFF"/>
+                </a:solidFill>
+              </a:defRPr>
+            </a:pPr>
+            <a:r>
+              <a:t>• Backend FastAPI Docs:</a:t>
+            </a:r>
+          </a:p>
+          <a:p>
+            <a:pPr>
+              <a:defRPr sz="900">
+                <a:solidFill>
+                  <a:srgbClr val="16A34A"/>
+                </a:solidFill>
+              </a:defRPr>
+            </a:pPr>
+            <a:r>
+              <a:t>  http://localhost:8000/docs</a:t>
+            </a:r>
+          </a:p>
+          <a:p>
+            <a:pPr>
+              <a:spcBef>
+                <a:spcPts val="300"/>
+              </a:spcBef>
+              <a:defRPr sz="1000" b="1">
+                <a:solidFill>
+                  <a:srgbClr val="FFFFFF"/>
+                </a:solidFill>
+              </a:defRPr>
+            </a:pPr>
+            <a:r>
+              <a:t>• National Overwatch Portal:</a:t>
+            </a:r>
+          </a:p>
+          <a:p>
+            <a:pPr>
+              <a:defRPr sz="900">
+                <a:solidFill>
+                  <a:srgbClr val="16A34A"/>
+                </a:solidFill>
+              </a:defRPr>
+            </a:pPr>
+            <a:r>
+              <a:t>  http://localhost:3000/#/portal/national</a:t>
+            </a:r>
+          </a:p>
+          <a:p>
+            <a:pPr>
+              <a:spcBef>
+                <a:spcPts val="300"/>
+              </a:spcBef>
+              <a:defRPr sz="1000" b="1">
+                <a:solidFill>
+                  <a:srgbClr val="FFFFFF"/>
+                </a:solidFill>
+              </a:defRPr>
+            </a:pPr>
+            <a:r>
+              <a:t>• Hospital Optimizer Suite:</a:t>
+            </a:r>
+          </a:p>
+          <a:p>
+            <a:pPr>
+              <a:defRPr sz="900">
+                <a:solidFill>
+                  <a:srgbClr val="16A34A"/>
+                </a:solidFill>
+              </a:defRPr>
+            </a:pPr>
+            <a:r>
+              <a:t>  http://localhost:3000/#/portal/hospital</a:t>
+            </a:r>
+          </a:p>
+          <a:p>
+            <a:pPr>
+              <a:spcBef>
+                <a:spcPts val="300"/>
+              </a:spcBef>
+              <a:defRPr sz="1000" b="1">
+                <a:solidFill>
+                  <a:srgbClr val="FFFFFF"/>
+                </a:solidFill>
+              </a:defRPr>
+            </a:pPr>
+            <a:r>
+              <a:t>• AI Route &amp; Fleet Optimizer:</a:t>
+            </a:r>
+          </a:p>
+          <a:p>
+            <a:pPr>
+              <a:defRPr sz="900">
+                <a:solidFill>
+                  <a:srgbClr val="16A34A"/>
+                </a:solidFill>
+              </a:defRPr>
+            </a:pPr>
+            <a:r>
+              <a:t>  http://localhost:3000/#/portal/routes</a:t>
+            </a:r>
+          </a:p>
+          <a:p>
+            <a:pPr>
+              <a:spcBef>
+                <a:spcPts val="300"/>
+              </a:spcBef>
+              <a:defRPr sz="1000" b="1">
+                <a:solidFill>
+                  <a:srgbClr val="FFFFFF"/>
+                </a:solidFill>
+              </a:defRPr>
+            </a:pPr>
+            <a:r>
+              <a:t>• District Health Officer Portal:</a:t>
+            </a:r>
+          </a:p>
+          <a:p>
+            <a:pPr>
+              <a:defRPr sz="900">
+                <a:solidFill>
+                  <a:srgbClr val="16A34A"/>
+                </a:solidFill>
+              </a:defRPr>
+            </a:pPr>
+            <a:r>
+              <a:t>  http://localhost:3000/#/portal/district</a:t>
+            </a:r>
+          </a:p>
+          <a:p>
+            <a:pPr>
+              <a:spcBef>
+                <a:spcPts val="300"/>
+              </a:spcBef>
+              <a:defRPr sz="1000" b="1">
+                <a:solidFill>
+                  <a:srgbClr val="FFFFFF"/>
+                </a:solidFill>
+              </a:defRPr>
+            </a:pPr>
+            <a:r>
+              <a:t>• Rural PHC Edge Terminal:</a:t>
+            </a:r>
+          </a:p>
+          <a:p>
+            <a:pPr>
+              <a:defRPr sz="900">
+                <a:solidFill>
+                  <a:srgbClr val="16A34A"/>
+                </a:solidFill>
+              </a:defRPr>
+            </a:pPr>
+            <a:r>
+              <a:t>  http://localhost:3000/#/portal/edge</a:t>
+            </a:r>
+          </a:p>
+          <a:p>
+            <a:pPr>
+              <a:spcBef>
+                <a:spcPts val="300"/>
+              </a:spcBef>
+              <a:defRPr sz="1000" b="1">
+                <a:solidFill>
+                  <a:srgbClr val="FFFFFF"/>
+                </a:solidFill>
+              </a:defRPr>
+            </a:pPr>
+            <a:r>
+              <a:t>• Developer / Admin Sandbox:</a:t>
+            </a:r>
+          </a:p>
+          <a:p>
+            <a:pPr>
+              <a:defRPr sz="900">
+                <a:solidFill>
+                  <a:srgbClr val="16A34A"/>
+                </a:solidFill>
+              </a:defRPr>
+            </a:pPr>
+            <a:r>
+              <a:t>  http://localhost:3000/#/portal/dev</a:t>
             </a:r>
           </a:p>
         </p:txBody>
@@ -3648,7 +5067,7 @@
               </a:defRPr>
             </a:pPr>
             <a:r>
-              <a:t>The Crisis in India's Primary Healthcare Supply Chain</a:t>
+              <a:t>The Dual Crisis in India's Healthcare Ecosystem</a:t>
             </a:r>
           </a:p>
         </p:txBody>
@@ -3743,7 +5162,7 @@
               </a:defRPr>
             </a:pPr>
             <a:r>
-              <a:t>• Rural PHCs frequently run out of Anti-Rabies, Insulin, ORS &amp; Antibiotics.</a:t>
+              <a:t>• Rural PHCs frequently run out of Anti-Rabies, Snake Antivenom, Insulin &amp; IV fluids.</a:t>
             </a:r>
           </a:p>
           <a:p>
@@ -3758,7 +5177,7 @@
               </a:defRPr>
             </a:pPr>
             <a:r>
-              <a:t>• Sudden seasonal footfall spikes catch clinics unprepared.</a:t>
+              <a:t>• Sudden seasonal footfall spikes catch rural clinics completely unprepared.</a:t>
             </a:r>
           </a:p>
           <a:p>
@@ -3773,7 +5192,7 @@
               </a:defRPr>
             </a:pPr>
             <a:r>
-              <a:t>• Delayed state-level tender cycles take 4 to 8 weeks to fulfill.</a:t>
+              <a:t>• Delayed state-level tender cycles take 4 to 8 weeks to replenish supplies.</a:t>
             </a:r>
           </a:p>
           <a:p>
@@ -3788,7 +5207,7 @@
               </a:defRPr>
             </a:pPr>
             <a:r>
-              <a:t>• Loss of critical golden hours for rural emergency patients.</a:t>
+              <a:t>• Loss of critical golden hours for emergency patients in remote villages.</a:t>
             </a:r>
           </a:p>
         </p:txBody>
@@ -3868,7 +5287,7 @@
               </a:defRPr>
             </a:pPr>
             <a:r>
-              <a:t>❌ Near-Expiry Waste &amp; Silos</a:t>
+              <a:t>❌ Expired Medicine Waste</a:t>
             </a:r>
           </a:p>
           <a:p>
@@ -3913,7 +5332,7 @@
               </a:defRPr>
             </a:pPr>
             <a:r>
-              <a:t>• Zero cross-PHC visibility causes preventable expiration of crores worth of drugs.</a:t>
+              <a:t>• Zero inter-clinic visibility causes preventable expiration of crores in drugs.</a:t>
             </a:r>
           </a:p>
           <a:p>
@@ -3928,7 +5347,7 @@
               </a:defRPr>
             </a:pPr>
             <a:r>
-              <a:t>• No mathematical mechanism for inter-clinic redistribution.</a:t>
+              <a:t>• Traditional supply chains lack algorithmic peer-to-peer redistribution.</a:t>
             </a:r>
           </a:p>
         </p:txBody>
@@ -3952,7 +5371,7 @@
           </a:solidFill>
           <a:ln w="19050">
             <a:solidFill>
-              <a:srgbClr val="94A3B8"/>
+              <a:srgbClr val="2563EB"/>
             </a:solidFill>
           </a:ln>
         </p:spPr>
@@ -4003,12 +5422,12 @@
             <a:pPr>
               <a:defRPr sz="1800" b="1">
                 <a:solidFill>
-                  <a:srgbClr val="94A3B8"/>
-                </a:solidFill>
-              </a:defRPr>
-            </a:pPr>
-            <a:r>
-              <a:t>❌ Connectivity &amp; Data Silos</a:t>
+                  <a:srgbClr val="2563EB"/>
+                </a:solidFill>
+              </a:defRPr>
+            </a:pPr>
+            <a:r>
+              <a:t>❌ Hospital Bottlenecks</a:t>
             </a:r>
           </a:p>
           <a:p>
@@ -4023,7 +5442,7 @@
               </a:defRPr>
             </a:pPr>
             <a:r>
-              <a:t>• Remote rural areas have intermittent 2G/3G or zero connectivity.</a:t>
+              <a:t>• Ad-hoc bed and ICU planning causes ward congestion alongside idle ICU buffers.</a:t>
             </a:r>
           </a:p>
           <a:p>
@@ -4038,7 +5457,7 @@
               </a:defRPr>
             </a:pPr>
             <a:r>
-              <a:t>• Traditional web portals crash or block data entry without active internet.</a:t>
+              <a:t>• Uncoordinated operating room scheduling results in 30%+ OT idle gaps.</a:t>
             </a:r>
           </a:p>
           <a:p>
@@ -4053,7 +5472,7 @@
               </a:defRPr>
             </a:pPr>
             <a:r>
-              <a:t>• Strict health privacy laws prevent pooling sensitive raw patient data.</a:t>
+              <a:t>• Doctors and nurses face severe burnout due to manual, unoptimized rostering.</a:t>
             </a:r>
           </a:p>
           <a:p>
@@ -4068,7 +5487,7 @@
               </a:defRPr>
             </a:pPr>
             <a:r>
-              <a:t>• No automated alert system when disasters or epidemics strike nearby.</a:t>
+              <a:t>• Zero advance warning for mass casualty accidents and epidemic spikes.</a:t>
             </a:r>
           </a:p>
         </p:txBody>
@@ -4199,7 +5618,7 @@
               </a:defRPr>
             </a:pPr>
             <a:r>
-              <a:t>SwasthyaSetu AI: An Autonomous Clinical Safety Net</a:t>
+              <a:t>SwasthyaSetu AI: Unified Dual-Layer Resilience Architecture</a:t>
             </a:r>
           </a:p>
         </p:txBody>
@@ -4294,7 +5713,7 @@
               </a:defRPr>
             </a:pPr>
             <a:r>
-              <a:t>Forecasts 7, 14, and 30-day medicine demand using seasonal epidemiological trends, footfall Poisson distributions, and historical depletion rates.</a:t>
+              <a:t>Forecasts 7, 14, and 30-day medicine demand and outpatient footfall using Poisson distributions, moving averages, and Prophet + XGBoost with 95% confidence intervals.</a:t>
             </a:r>
           </a:p>
         </p:txBody>
@@ -4389,7 +5808,7 @@
               </a:defRPr>
             </a:pPr>
             <a:r>
-              <a:t>Mathematical Linear Programming (PuLP) matches surplus clinics with shortage clinics, optimizing transit routes, distance, and FEFO expiry prioritization.</a:t>
+              <a:t>Mathematical Linear Programming (PuLP) matches surplus clinics with shortage clinics, optimizing transit routes, distance, and FEFO expiry prioritization while maintaining safety buffers.</a:t>
             </a:r>
           </a:p>
         </p:txBody>
@@ -4403,6 +5822,101 @@
         <p:spPr>
           <a:xfrm>
             <a:off x="731520" y="3931920"/>
+            <a:ext cx="5120640" cy="2011680"/>
+          </a:xfrm>
+          <a:prstGeom prst="roundRect">
+            <a:avLst/>
+          </a:prstGeom>
+          <a:solidFill>
+            <a:srgbClr val="1E293B"/>
+          </a:solidFill>
+          <a:ln w="19050">
+            <a:solidFill>
+              <a:srgbClr val="2563EB"/>
+            </a:solidFill>
+          </a:ln>
+        </p:spPr>
+        <p:style>
+          <a:lnRef idx="1">
+            <a:schemeClr val="accent1"/>
+          </a:lnRef>
+          <a:fillRef idx="3">
+            <a:schemeClr val="accent1"/>
+          </a:fillRef>
+          <a:effectRef idx="2">
+            <a:schemeClr val="accent1"/>
+          </a:effectRef>
+          <a:fontRef idx="minor">
+            <a:schemeClr val="lt1"/>
+          </a:fontRef>
+        </p:style>
+        <p:txBody>
+          <a:bodyPr rtlCol="0" anchor="ctr"/>
+          <a:lstStyle/>
+          <a:p>
+            <a:pPr algn="ctr"/>
+          </a:p>
+        </p:txBody>
+      </p:sp>
+      <p:sp>
+        <p:nvSpPr>
+          <p:cNvPr id="10" name="TextBox 9"/>
+          <p:cNvSpPr txBox="1"/>
+          <p:nvPr/>
+        </p:nvSpPr>
+        <p:spPr>
+          <a:xfrm>
+            <a:off x="914400" y="4114800"/>
+            <a:ext cx="4754880" cy="1645920"/>
+          </a:xfrm>
+          <a:prstGeom prst="rect">
+            <a:avLst/>
+          </a:prstGeom>
+          <a:noFill/>
+        </p:spPr>
+        <p:txBody>
+          <a:bodyPr wrap="square">
+            <a:spAutoFit/>
+          </a:bodyPr>
+          <a:lstStyle/>
+          <a:p>
+            <a:pPr>
+              <a:defRPr sz="1600" b="1">
+                <a:solidFill>
+                  <a:srgbClr val="2563EB"/>
+                </a:solidFill>
+              </a:defRPr>
+            </a:pPr>
+            <a:r>
+              <a:t>🏨 Hospital Resource Optimizer</a:t>
+            </a:r>
+          </a:p>
+          <a:p>
+            <a:pPr>
+              <a:spcBef>
+                <a:spcPts val="600"/>
+              </a:spcBef>
+              <a:defRPr sz="1200">
+                <a:solidFill>
+                  <a:srgbClr val="FFFFFF"/>
+                </a:solidFill>
+              </a:defRPr>
+            </a:pPr>
+            <a:r>
+              <a:t>Optimizes bed allocations, preserves 15% ICU emergency buffers, schedules surgical OTs via Google OR-Tools CP-SAT, and rosters clinical staff to eliminate fatigue.</a:t>
+            </a:r>
+          </a:p>
+        </p:txBody>
+      </p:sp>
+      <p:sp>
+        <p:nvSpPr>
+          <p:cNvPr id="11" name="Rounded Rectangle 10"/>
+          <p:cNvSpPr/>
+          <p:nvPr/>
+        </p:nvSpPr>
+        <p:spPr>
+          <a:xfrm>
+            <a:off x="6126480" y="3931920"/>
             <a:ext cx="5120640" cy="2011680"/>
           </a:xfrm>
           <a:prstGeom prst="roundRect">
@@ -4441,13 +5955,13 @@
       </p:sp>
       <p:sp>
         <p:nvSpPr>
-          <p:cNvPr id="10" name="TextBox 9"/>
+          <p:cNvPr id="12" name="TextBox 11"/>
           <p:cNvSpPr txBox="1"/>
           <p:nvPr/>
         </p:nvSpPr>
         <p:spPr>
           <a:xfrm>
-            <a:off x="914400" y="4114800"/>
+            <a:off x="6309360" y="4114800"/>
             <a:ext cx="4754880" cy="1645920"/>
           </a:xfrm>
           <a:prstGeom prst="rect">
@@ -4469,7 +5983,7 @@
               </a:defRPr>
             </a:pPr>
             <a:r>
-              <a:t>📡 Proximity Early Warning &amp; Tragedy Radar</a:t>
+              <a:t>📡 Proximity Early Warning Radar</a:t>
             </a:r>
           </a:p>
           <a:p>
@@ -4484,102 +5998,7 @@
               </a:defRPr>
             </a:pPr>
             <a:r>
-              <a:t>Haversine geospatial AI detects disease outbreaks (&lt;28km) and mass-casualty tragedies (&lt;20km), predicting ambulance arrival ETAs &amp; patient influx.</a:t>
-            </a:r>
-          </a:p>
-        </p:txBody>
-      </p:sp>
-      <p:sp>
-        <p:nvSpPr>
-          <p:cNvPr id="11" name="Rounded Rectangle 10"/>
-          <p:cNvSpPr/>
-          <p:nvPr/>
-        </p:nvSpPr>
-        <p:spPr>
-          <a:xfrm>
-            <a:off x="6126480" y="3931920"/>
-            <a:ext cx="5120640" cy="2011680"/>
-          </a:xfrm>
-          <a:prstGeom prst="roundRect">
-            <a:avLst/>
-          </a:prstGeom>
-          <a:solidFill>
-            <a:srgbClr val="1E293B"/>
-          </a:solidFill>
-          <a:ln w="19050">
-            <a:solidFill>
-              <a:srgbClr val="EA580C"/>
-            </a:solidFill>
-          </a:ln>
-        </p:spPr>
-        <p:style>
-          <a:lnRef idx="1">
-            <a:schemeClr val="accent1"/>
-          </a:lnRef>
-          <a:fillRef idx="3">
-            <a:schemeClr val="accent1"/>
-          </a:fillRef>
-          <a:effectRef idx="2">
-            <a:schemeClr val="accent1"/>
-          </a:effectRef>
-          <a:fontRef idx="minor">
-            <a:schemeClr val="lt1"/>
-          </a:fontRef>
-        </p:style>
-        <p:txBody>
-          <a:bodyPr rtlCol="0" anchor="ctr"/>
-          <a:lstStyle/>
-          <a:p>
-            <a:pPr algn="ctr"/>
-          </a:p>
-        </p:txBody>
-      </p:sp>
-      <p:sp>
-        <p:nvSpPr>
-          <p:cNvPr id="12" name="TextBox 11"/>
-          <p:cNvSpPr txBox="1"/>
-          <p:nvPr/>
-        </p:nvSpPr>
-        <p:spPr>
-          <a:xfrm>
-            <a:off x="6309360" y="4114800"/>
-            <a:ext cx="4754880" cy="1645920"/>
-          </a:xfrm>
-          <a:prstGeom prst="rect">
-            <a:avLst/>
-          </a:prstGeom>
-          <a:noFill/>
-        </p:spPr>
-        <p:txBody>
-          <a:bodyPr wrap="square">
-            <a:spAutoFit/>
-          </a:bodyPr>
-          <a:lstStyle/>
-          <a:p>
-            <a:pPr>
-              <a:defRPr sz="1600" b="1">
-                <a:solidFill>
-                  <a:srgbClr val="EA580C"/>
-                </a:solidFill>
-              </a:defRPr>
-            </a:pPr>
-            <a:r>
-              <a:t>🔒 Federated Learning &amp; Offline Edge</a:t>
-            </a:r>
-          </a:p>
-          <a:p>
-            <a:pPr>
-              <a:spcBef>
-                <a:spcPts val="600"/>
-              </a:spcBef>
-              <a:defRPr sz="1200">
-                <a:solidFill>
-                  <a:srgbClr val="FFFFFF"/>
-                </a:solidFill>
-              </a:defRPr>
-            </a:pPr>
-            <a:r>
-              <a:t>FedAvg preserves patient confidentiality (DISHA compliant) while local IndexedDB edge sync allows zero-downtime offline rural operation.</a:t>
+              <a:t>Haversine geospatial AI detects disease outbreaks (&lt;28km) and mass-casualty tragedies (&lt;20km), predicting ambulance arrival ETAs &amp; patient influx with 1-click triage activation.</a:t>
             </a:r>
           </a:p>
         </p:txBody>
@@ -4675,7 +6094,7 @@
               </a:defRPr>
             </a:pPr>
             <a:r>
-              <a:t>NEW FEATURE HIGHLIGHT</a:t>
+              <a:t>GEOSPATIAL EARLY WARNING</a:t>
             </a:r>
           </a:p>
         </p:txBody>
@@ -5116,7 +6535,7 @@
               </a:defRPr>
             </a:pPr>
             <a:r>
-              <a:t>FEASIBILITY &amp; GOVERNANCE</a:t>
+              <a:t>IN-HOSPITAL INTELLIGENCE</a:t>
             </a:r>
           </a:p>
         </p:txBody>
@@ -5151,7 +6570,7 @@
               </a:defRPr>
             </a:pPr>
             <a:r>
-              <a:t>Visibility, Transparency &amp; Feasibility Analysis</a:t>
+              <a:t>AI Hospital Resource Optimization Suite</a:t>
             </a:r>
           </a:p>
         </p:txBody>
@@ -5165,6 +6584,146 @@
         <p:spPr>
           <a:xfrm>
             <a:off x="731520" y="1645920"/>
+            <a:ext cx="5120640" cy="2011680"/>
+          </a:xfrm>
+          <a:prstGeom prst="roundRect">
+            <a:avLst/>
+          </a:prstGeom>
+          <a:solidFill>
+            <a:srgbClr val="1E293B"/>
+          </a:solidFill>
+          <a:ln w="19050">
+            <a:solidFill>
+              <a:srgbClr val="2563EB"/>
+            </a:solidFill>
+          </a:ln>
+        </p:spPr>
+        <p:style>
+          <a:lnRef idx="1">
+            <a:schemeClr val="accent1"/>
+          </a:lnRef>
+          <a:fillRef idx="3">
+            <a:schemeClr val="accent1"/>
+          </a:fillRef>
+          <a:effectRef idx="2">
+            <a:schemeClr val="accent1"/>
+          </a:effectRef>
+          <a:fontRef idx="minor">
+            <a:schemeClr val="lt1"/>
+          </a:fontRef>
+        </p:style>
+        <p:txBody>
+          <a:bodyPr rtlCol="0" anchor="ctr"/>
+          <a:lstStyle/>
+          <a:p>
+            <a:pPr algn="ctr"/>
+          </a:p>
+        </p:txBody>
+      </p:sp>
+      <p:sp>
+        <p:nvSpPr>
+          <p:cNvPr id="6" name="TextBox 5"/>
+          <p:cNvSpPr txBox="1"/>
+          <p:nvPr/>
+        </p:nvSpPr>
+        <p:spPr>
+          <a:xfrm>
+            <a:off x="914400" y="1783080"/>
+            <a:ext cx="4754880" cy="1737360"/>
+          </a:xfrm>
+          <a:prstGeom prst="rect">
+            <a:avLst/>
+          </a:prstGeom>
+          <a:noFill/>
+        </p:spPr>
+        <p:txBody>
+          <a:bodyPr wrap="square">
+            <a:spAutoFit/>
+          </a:bodyPr>
+          <a:lstStyle/>
+          <a:p>
+            <a:pPr>
+              <a:defRPr sz="1500" b="1">
+                <a:solidFill>
+                  <a:srgbClr val="2563EB"/>
+                </a:solidFill>
+              </a:defRPr>
+            </a:pPr>
+            <a:r>
+              <a:t>🛏️ Bed &amp; ICU Optimizer</a:t>
+            </a:r>
+          </a:p>
+          <a:p>
+            <a:pPr>
+              <a:spcBef>
+                <a:spcPts val="200"/>
+              </a:spcBef>
+              <a:defRPr sz="1100">
+                <a:solidFill>
+                  <a:srgbClr val="FFFFFF"/>
+                </a:solidFill>
+              </a:defRPr>
+            </a:pPr>
+            <a:r>
+              <a:t>• Allocates beds across wards and critical ICU units.</a:t>
+            </a:r>
+          </a:p>
+          <a:p>
+            <a:pPr>
+              <a:spcBef>
+                <a:spcPts val="200"/>
+              </a:spcBef>
+              <a:defRPr sz="1100">
+                <a:solidFill>
+                  <a:srgbClr val="FFFFFF"/>
+                </a:solidFill>
+              </a:defRPr>
+            </a:pPr>
+            <a:r>
+              <a:t>• Enforces mandatory 15% emergency reserve ICU buffer.</a:t>
+            </a:r>
+          </a:p>
+          <a:p>
+            <a:pPr>
+              <a:spcBef>
+                <a:spcPts val="200"/>
+              </a:spcBef>
+              <a:defRPr sz="1100">
+                <a:solidFill>
+                  <a:srgbClr val="FFFFFF"/>
+                </a:solidFill>
+              </a:defRPr>
+            </a:pPr>
+            <a:r>
+              <a:t>• Handles isolation rules and step-down discharge velocity.</a:t>
+            </a:r>
+          </a:p>
+          <a:p>
+            <a:pPr>
+              <a:spcBef>
+                <a:spcPts val="200"/>
+              </a:spcBef>
+              <a:defRPr sz="1100">
+                <a:solidFill>
+                  <a:srgbClr val="FFFFFF"/>
+                </a:solidFill>
+              </a:defRPr>
+            </a:pPr>
+            <a:r>
+              <a:t>• Formulated via MILP (PuLP / OR-Tools).</a:t>
+            </a:r>
+          </a:p>
+        </p:txBody>
+      </p:sp>
+      <p:sp>
+        <p:nvSpPr>
+          <p:cNvPr id="7" name="Rounded Rectangle 6"/>
+          <p:cNvSpPr/>
+          <p:nvPr/>
+        </p:nvSpPr>
+        <p:spPr>
+          <a:xfrm>
+            <a:off x="6126480" y="1645920"/>
             <a:ext cx="5120640" cy="2011680"/>
           </a:xfrm>
           <a:prstGeom prst="roundRect">
@@ -5203,13 +6762,13 @@
       </p:sp>
       <p:sp>
         <p:nvSpPr>
-          <p:cNvPr id="6" name="TextBox 5"/>
+          <p:cNvPr id="8" name="TextBox 7"/>
           <p:cNvSpPr txBox="1"/>
           <p:nvPr/>
         </p:nvSpPr>
         <p:spPr>
           <a:xfrm>
-            <a:off x="914400" y="1783080"/>
+            <a:off x="6309360" y="1783080"/>
             <a:ext cx="4754880" cy="1737360"/>
           </a:xfrm>
           <a:prstGeom prst="rect">
@@ -5231,13 +6790,13 @@
               </a:defRPr>
             </a:pPr>
             <a:r>
-              <a:t>👁️ Real-Time Visibility</a:t>
-            </a:r>
-          </a:p>
-          <a:p>
-            <a:pPr>
-              <a:spcBef>
-                <a:spcPts val="300"/>
+              <a:t>⏱️ Operating Room Scheduler</a:t>
+            </a:r>
+          </a:p>
+          <a:p>
+            <a:pPr>
+              <a:spcBef>
+                <a:spcPts val="200"/>
               </a:spcBef>
               <a:defRPr sz="1100">
                 <a:solidFill>
@@ -5246,13 +6805,13 @@
               </a:defRPr>
             </a:pPr>
             <a:r>
-              <a:t>• National, State, District &amp; PHC multi-level dashboards.</a:t>
-            </a:r>
-          </a:p>
-          <a:p>
-            <a:pPr>
-              <a:spcBef>
-                <a:spcPts val="300"/>
+              <a:t>• Builds surgical OT schedules cutting idle time.</a:t>
+            </a:r>
+          </a:p>
+          <a:p>
+            <a:pPr>
+              <a:spcBef>
+                <a:spcPts val="200"/>
               </a:spcBef>
               <a:defRPr sz="1100">
                 <a:solidFill>
@@ -5261,13 +6820,13 @@
               </a:defRPr>
             </a:pPr>
             <a:r>
-              <a:t>• Live Days of Supply Remaining (DoSR) indicators.</a:t>
-            </a:r>
-          </a:p>
-          <a:p>
-            <a:pPr>
-              <a:spcBef>
-                <a:spcPts val="300"/>
+              <a:t>• Eliminates surgeon overtime and scheduling conflicts.</a:t>
+            </a:r>
+          </a:p>
+          <a:p>
+            <a:pPr>
+              <a:spcBef>
+                <a:spcPts val="200"/>
               </a:spcBef>
               <a:defRPr sz="1100">
                 <a:solidFill>
@@ -5276,13 +6835,13 @@
               </a:defRPr>
             </a:pPr>
             <a:r>
-              <a:t>• Interactive geospatial heatmaps of vulnerable clinics.</a:t>
-            </a:r>
-          </a:p>
-          <a:p>
-            <a:pPr>
-              <a:spcBef>
-                <a:spcPts val="300"/>
+              <a:t>• Accounts for cleaning gaps and emergency reservations.</a:t>
+            </a:r>
+          </a:p>
+          <a:p>
+            <a:pPr>
+              <a:spcBef>
+                <a:spcPts val="200"/>
               </a:spcBef>
               <a:defRPr sz="1100">
                 <a:solidFill>
@@ -5291,147 +6850,7 @@
               </a:defRPr>
             </a:pPr>
             <a:r>
-              <a:t>• Audit trail for every medicine batch &amp; transfer order.</a:t>
-            </a:r>
-          </a:p>
-        </p:txBody>
-      </p:sp>
-      <p:sp>
-        <p:nvSpPr>
-          <p:cNvPr id="7" name="Rounded Rectangle 6"/>
-          <p:cNvSpPr/>
-          <p:nvPr/>
-        </p:nvSpPr>
-        <p:spPr>
-          <a:xfrm>
-            <a:off x="6126480" y="1645920"/>
-            <a:ext cx="5120640" cy="2011680"/>
-          </a:xfrm>
-          <a:prstGeom prst="roundRect">
-            <a:avLst/>
-          </a:prstGeom>
-          <a:solidFill>
-            <a:srgbClr val="1E293B"/>
-          </a:solidFill>
-          <a:ln w="19050">
-            <a:solidFill>
-              <a:srgbClr val="16A34A"/>
-            </a:solidFill>
-          </a:ln>
-        </p:spPr>
-        <p:style>
-          <a:lnRef idx="1">
-            <a:schemeClr val="accent1"/>
-          </a:lnRef>
-          <a:fillRef idx="3">
-            <a:schemeClr val="accent1"/>
-          </a:fillRef>
-          <a:effectRef idx="2">
-            <a:schemeClr val="accent1"/>
-          </a:effectRef>
-          <a:fontRef idx="minor">
-            <a:schemeClr val="lt1"/>
-          </a:fontRef>
-        </p:style>
-        <p:txBody>
-          <a:bodyPr rtlCol="0" anchor="ctr"/>
-          <a:lstStyle/>
-          <a:p>
-            <a:pPr algn="ctr"/>
-          </a:p>
-        </p:txBody>
-      </p:sp>
-      <p:sp>
-        <p:nvSpPr>
-          <p:cNvPr id="8" name="TextBox 7"/>
-          <p:cNvSpPr txBox="1"/>
-          <p:nvPr/>
-        </p:nvSpPr>
-        <p:spPr>
-          <a:xfrm>
-            <a:off x="6309360" y="1783080"/>
-            <a:ext cx="4754880" cy="1737360"/>
-          </a:xfrm>
-          <a:prstGeom prst="rect">
-            <a:avLst/>
-          </a:prstGeom>
-          <a:noFill/>
-        </p:spPr>
-        <p:txBody>
-          <a:bodyPr wrap="square">
-            <a:spAutoFit/>
-          </a:bodyPr>
-          <a:lstStyle/>
-          <a:p>
-            <a:pPr>
-              <a:defRPr sz="1500" b="1">
-                <a:solidFill>
-                  <a:srgbClr val="16A34A"/>
-                </a:solidFill>
-              </a:defRPr>
-            </a:pPr>
-            <a:r>
-              <a:t>⚙️ Technical Feasibility</a:t>
-            </a:r>
-          </a:p>
-          <a:p>
-            <a:pPr>
-              <a:spcBef>
-                <a:spcPts val="300"/>
-              </a:spcBef>
-              <a:defRPr sz="1100">
-                <a:solidFill>
-                  <a:srgbClr val="FFFFFF"/>
-                </a:solidFill>
-              </a:defRPr>
-            </a:pPr>
-            <a:r>
-              <a:t>• Lightweight FastAPI backend with SQLite/PostgreSQL.</a:t>
-            </a:r>
-          </a:p>
-          <a:p>
-            <a:pPr>
-              <a:spcBef>
-                <a:spcPts val="300"/>
-              </a:spcBef>
-              <a:defRPr sz="1100">
-                <a:solidFill>
-                  <a:srgbClr val="FFFFFF"/>
-                </a:solidFill>
-              </a:defRPr>
-            </a:pPr>
-            <a:r>
-              <a:t>• Vite + React frontend running efficiently on low-end tablets.</a:t>
-            </a:r>
-          </a:p>
-          <a:p>
-            <a:pPr>
-              <a:spcBef>
-                <a:spcPts val="300"/>
-              </a:spcBef>
-              <a:defRPr sz="1100">
-                <a:solidFill>
-                  <a:srgbClr val="FFFFFF"/>
-                </a:solidFill>
-              </a:defRPr>
-            </a:pPr>
-            <a:r>
-              <a:t>• Offline-first IndexedDB delta sync requires zero extra hardware.</a:t>
-            </a:r>
-          </a:p>
-          <a:p>
-            <a:pPr>
-              <a:spcBef>
-                <a:spcPts val="300"/>
-              </a:spcBef>
-              <a:defRPr sz="1100">
-                <a:solidFill>
-                  <a:srgbClr val="FFFFFF"/>
-                </a:solidFill>
-              </a:defRPr>
-            </a:pPr>
-            <a:r>
-              <a:t>• Fast MILP convergence (&lt;500ms for 150 PHCs).</a:t>
+              <a:t>• Powered by Google OR-Tools CP-SAT job-shop solver.</a:t>
             </a:r>
           </a:p>
         </p:txBody>
@@ -5511,13 +6930,13 @@
               </a:defRPr>
             </a:pPr>
             <a:r>
-              <a:t>💰 Economic Feasibility</a:t>
-            </a:r>
-          </a:p>
-          <a:p>
-            <a:pPr>
-              <a:spcBef>
-                <a:spcPts val="300"/>
+              <a:t>👨‍⚕️ Staff Roster Allocation</a:t>
+            </a:r>
+          </a:p>
+          <a:p>
+            <a:pPr>
+              <a:spcBef>
+                <a:spcPts val="200"/>
               </a:spcBef>
               <a:defRPr sz="1100">
                 <a:solidFill>
@@ -5526,13 +6945,13 @@
               </a:defRPr>
             </a:pPr>
             <a:r>
-              <a:t>• 100% Open Source tech stack (zero proprietary license fees).</a:t>
-            </a:r>
-          </a:p>
-          <a:p>
-            <a:pPr>
-              <a:spcBef>
-                <a:spcPts val="300"/>
+              <a:t>• Rosters doctors, nurses &amp; techs by predicted load.</a:t>
+            </a:r>
+          </a:p>
+          <a:p>
+            <a:pPr>
+              <a:spcBef>
+                <a:spcPts val="200"/>
               </a:spcBef>
               <a:defRPr sz="1100">
                 <a:solidFill>
@@ -5541,13 +6960,13 @@
               </a:defRPr>
             </a:pPr>
             <a:r>
-              <a:t>• Saves crores in expired medicine waste annually.</a:t>
-            </a:r>
-          </a:p>
-          <a:p>
-            <a:pPr>
-              <a:spcBef>
-                <a:spcPts val="300"/>
+              <a:t>• Enforces shift limits, rest hours &amp; skill qualifications.</a:t>
+            </a:r>
+          </a:p>
+          <a:p>
+            <a:pPr>
+              <a:spcBef>
+                <a:spcPts val="200"/>
               </a:spcBef>
               <a:defRPr sz="1100">
                 <a:solidFill>
@@ -5556,13 +6975,13 @@
               </a:defRPr>
             </a:pPr>
             <a:r>
-              <a:t>• Reduces emergency commercial spot purchasing costs.</a:t>
-            </a:r>
-          </a:p>
-          <a:p>
-            <a:pPr>
-              <a:spcBef>
-                <a:spcPts val="300"/>
+              <a:t>• Reduces clinical burnout during peak rush periods.</a:t>
+            </a:r>
+          </a:p>
+          <a:p>
+            <a:pPr>
+              <a:spcBef>
+                <a:spcPts val="200"/>
               </a:spcBef>
               <a:defRPr sz="1100">
                 <a:solidFill>
@@ -5571,7 +6990,7 @@
               </a:defRPr>
             </a:pPr>
             <a:r>
-              <a:t>• Utilizes existing rural PHC computer/smartphone infrastructure.</a:t>
+              <a:t>• Dynamically rebalances from low-acuity day clinics.</a:t>
             </a:r>
           </a:p>
         </p:txBody>
@@ -5595,7 +7014,7 @@
           </a:solidFill>
           <a:ln w="19050">
             <a:solidFill>
-              <a:srgbClr val="EA580C"/>
+              <a:srgbClr val="9333EA"/>
             </a:solidFill>
           </a:ln>
         </p:spPr>
@@ -5646,18 +7065,18 @@
             <a:pPr>
               <a:defRPr sz="1500" b="1">
                 <a:solidFill>
-                  <a:srgbClr val="EA580C"/>
-                </a:solidFill>
-              </a:defRPr>
-            </a:pPr>
-            <a:r>
-              <a:t>📜 Regulatory &amp; Compliance</a:t>
-            </a:r>
-          </a:p>
-          <a:p>
-            <a:pPr>
-              <a:spcBef>
-                <a:spcPts val="300"/>
+                  <a:srgbClr val="9333EA"/>
+                </a:solidFill>
+              </a:defRPr>
+            </a:pPr>
+            <a:r>
+              <a:t>🧪 What-If Disaster Simulator</a:t>
+            </a:r>
+          </a:p>
+          <a:p>
+            <a:pPr>
+              <a:spcBef>
+                <a:spcPts val="200"/>
               </a:spcBef>
               <a:defRPr sz="1100">
                 <a:solidFill>
@@ -5666,13 +7085,13 @@
               </a:defRPr>
             </a:pPr>
             <a:r>
-              <a:t>• Complies with DPDP Act 2023 &amp; DISHA privacy standards.</a:t>
-            </a:r>
-          </a:p>
-          <a:p>
-            <a:pPr>
-              <a:spcBef>
-                <a:spcPts val="300"/>
+              <a:t>• Tests shock scenarios (e.g. '+40% Outbreak', 'Mass Crash').</a:t>
+            </a:r>
+          </a:p>
+          <a:p>
+            <a:pPr>
+              <a:spcBef>
+                <a:spcPts val="200"/>
               </a:spcBef>
               <a:defRPr sz="1100">
                 <a:solidFill>
@@ -5681,13 +7100,13 @@
               </a:defRPr>
             </a:pPr>
             <a:r>
-              <a:t>• Human-in-the-loop: CMOs retain full authority over approvals.</a:t>
-            </a:r>
-          </a:p>
-          <a:p>
-            <a:pPr>
-              <a:spcBef>
-                <a:spcPts val="300"/>
+              <a:t>• SimPy discrete-event simulation + RL policy agent.</a:t>
+            </a:r>
+          </a:p>
+          <a:p>
+            <a:pPr>
+              <a:spcBef>
+                <a:spcPts val="200"/>
               </a:spcBef>
               <a:defRPr sz="1100">
                 <a:solidFill>
@@ -5696,13 +7115,13 @@
               </a:defRPr>
             </a:pPr>
             <a:r>
-              <a:t>• ABDM Health Facility Registry &amp; M1/M2/M3 consent standards.</a:t>
-            </a:r>
-          </a:p>
-          <a:p>
-            <a:pPr>
-              <a:spcBef>
-                <a:spcPts val="300"/>
+              <a:t>• Pre-calculates oxygen, ventilator &amp; blood requirements.</a:t>
+            </a:r>
+          </a:p>
+          <a:p>
+            <a:pPr>
+              <a:spcBef>
+                <a:spcPts val="200"/>
               </a:spcBef>
               <a:defRPr sz="1100">
                 <a:solidFill>
@@ -5711,7 +7130,7 @@
               </a:defRPr>
             </a:pPr>
             <a:r>
-              <a:t>• eVIN cold-chain &amp; HMIS health data interoperability.</a:t>
+              <a:t>• Human-in-the-loop: Admin 1-click approve / reject actions.</a:t>
             </a:r>
           </a:p>
         </p:txBody>
@@ -5807,7 +7226,7 @@
               </a:defRPr>
             </a:pPr>
             <a:r>
-              <a:t>SCOPE &amp; IMPACT</a:t>
+              <a:t>LOGISTICS &amp; DRONE CORRIDORS</a:t>
             </a:r>
           </a:p>
         </p:txBody>
@@ -5842,7 +7261,7 @@
               </a:defRPr>
             </a:pPr>
             <a:r>
-              <a:t>Project Scope, Impact Metrics &amp; Scaling Roadmap</a:t>
+              <a:t>AI Route &amp; Fleet Transit Logistics Optimizer</a:t>
             </a:r>
           </a:p>
         </p:txBody>
@@ -5856,7 +7275,7 @@
         <p:spPr>
           <a:xfrm>
             <a:off x="731520" y="1645920"/>
-            <a:ext cx="10698480" cy="1325880"/>
+            <a:ext cx="5120640" cy="2011680"/>
           </a:xfrm>
           <a:prstGeom prst="roundRect">
             <a:avLst/>
@@ -5900,8 +7319,8 @@
         </p:nvSpPr>
         <p:spPr>
           <a:xfrm>
-            <a:off x="960120" y="1755648"/>
-            <a:ext cx="10241280" cy="1097280"/>
+            <a:off x="914400" y="1783080"/>
+            <a:ext cx="4754880" cy="1737360"/>
           </a:xfrm>
           <a:prstGeom prst="rect">
             <a:avLst/>
@@ -5922,7 +7341,7 @@
               </a:defRPr>
             </a:pPr>
             <a:r>
-              <a:t>📍 Phase 1: District Pilot (Completed)</a:t>
+              <a:t>🚚 Capacitated Vehicle Routing (CVRP)</a:t>
             </a:r>
           </a:p>
           <a:p>
@@ -5937,7 +7356,7 @@
               </a:defRPr>
             </a:pPr>
             <a:r>
-              <a:t>• 150 PHCs seeded across 15 districts (Maharashtra, Karnataka, UP).</a:t>
+              <a:t>• Calculates multi-stop delivery routes for medicine supply vans.</a:t>
             </a:r>
           </a:p>
           <a:p>
@@ -5952,7 +7371,7 @@
               </a:defRPr>
             </a:pPr>
             <a:r>
-              <a:t>• Full demand forecasting &amp; MILP redistribution engine.</a:t>
+              <a:t>• Minimizes transit distance, toll costs, and road transit times.</a:t>
             </a:r>
           </a:p>
           <a:p>
@@ -5967,7 +7386,22 @@
               </a:defRPr>
             </a:pPr>
             <a:r>
-              <a:t>• Offline edge sync &amp; 11 Indian languages support.</a:t>
+              <a:t>• Coordinates inter-PHC FEFO medicine dispatches.</a:t>
+            </a:r>
+          </a:p>
+          <a:p>
+            <a:pPr>
+              <a:spcBef>
+                <a:spcPts val="200"/>
+              </a:spcBef>
+              <a:defRPr sz="1100">
+                <a:solidFill>
+                  <a:srgbClr val="FFFFFF"/>
+                </a:solidFill>
+              </a:defRPr>
+            </a:pPr>
+            <a:r>
+              <a:t>• Live road metric summary and fuel efficiency indicators.</a:t>
             </a:r>
           </a:p>
         </p:txBody>
@@ -5980,8 +7414,148 @@
         </p:nvSpPr>
         <p:spPr>
           <a:xfrm>
-            <a:off x="731520" y="3154680"/>
-            <a:ext cx="10698480" cy="1325880"/>
+            <a:off x="6126480" y="1645920"/>
+            <a:ext cx="5120640" cy="2011680"/>
+          </a:xfrm>
+          <a:prstGeom prst="roundRect">
+            <a:avLst/>
+          </a:prstGeom>
+          <a:solidFill>
+            <a:srgbClr val="1E293B"/>
+          </a:solidFill>
+          <a:ln w="19050">
+            <a:solidFill>
+              <a:srgbClr val="2563EB"/>
+            </a:solidFill>
+          </a:ln>
+        </p:spPr>
+        <p:style>
+          <a:lnRef idx="1">
+            <a:schemeClr val="accent1"/>
+          </a:lnRef>
+          <a:fillRef idx="3">
+            <a:schemeClr val="accent1"/>
+          </a:fillRef>
+          <a:effectRef idx="2">
+            <a:schemeClr val="accent1"/>
+          </a:effectRef>
+          <a:fontRef idx="minor">
+            <a:schemeClr val="lt1"/>
+          </a:fontRef>
+        </p:style>
+        <p:txBody>
+          <a:bodyPr rtlCol="0" anchor="ctr"/>
+          <a:lstStyle/>
+          <a:p>
+            <a:pPr algn="ctr"/>
+          </a:p>
+        </p:txBody>
+      </p:sp>
+      <p:sp>
+        <p:nvSpPr>
+          <p:cNvPr id="8" name="TextBox 7"/>
+          <p:cNvSpPr txBox="1"/>
+          <p:nvPr/>
+        </p:nvSpPr>
+        <p:spPr>
+          <a:xfrm>
+            <a:off x="6309360" y="1783080"/>
+            <a:ext cx="4754880" cy="1737360"/>
+          </a:xfrm>
+          <a:prstGeom prst="rect">
+            <a:avLst/>
+          </a:prstGeom>
+          <a:noFill/>
+        </p:spPr>
+        <p:txBody>
+          <a:bodyPr wrap="square">
+            <a:spAutoFit/>
+          </a:bodyPr>
+          <a:lstStyle/>
+          <a:p>
+            <a:pPr>
+              <a:defRPr sz="1500" b="1">
+                <a:solidFill>
+                  <a:srgbClr val="2563EB"/>
+                </a:solidFill>
+              </a:defRPr>
+            </a:pPr>
+            <a:r>
+              <a:t>🚁 Autonomous Drone Corridors</a:t>
+            </a:r>
+          </a:p>
+          <a:p>
+            <a:pPr>
+              <a:spcBef>
+                <a:spcPts val="200"/>
+              </a:spcBef>
+              <a:defRPr sz="1100">
+                <a:solidFill>
+                  <a:srgbClr val="FFFFFF"/>
+                </a:solidFill>
+              </a:defRPr>
+            </a:pPr>
+            <a:r>
+              <a:t>• Monitors aerial delivery corridors for high-urgency supplies.</a:t>
+            </a:r>
+          </a:p>
+          <a:p>
+            <a:pPr>
+              <a:spcBef>
+                <a:spcPts val="200"/>
+              </a:spcBef>
+              <a:defRPr sz="1100">
+                <a:solidFill>
+                  <a:srgbClr val="FFFFFF"/>
+                </a:solidFill>
+              </a:defRPr>
+            </a:pPr>
+            <a:r>
+              <a:t>• Transports cold-chain antivenom and vaccines to hilly terrains.</a:t>
+            </a:r>
+          </a:p>
+          <a:p>
+            <a:pPr>
+              <a:spcBef>
+                <a:spcPts val="200"/>
+              </a:spcBef>
+              <a:defRPr sz="1100">
+                <a:solidFill>
+                  <a:srgbClr val="FFFFFF"/>
+                </a:solidFill>
+              </a:defRPr>
+            </a:pPr>
+            <a:r>
+              <a:t>• Bypasses congested highways during acute emergencies.</a:t>
+            </a:r>
+          </a:p>
+          <a:p>
+            <a:pPr>
+              <a:spcBef>
+                <a:spcPts val="200"/>
+              </a:spcBef>
+              <a:defRPr sz="1100">
+                <a:solidFill>
+                  <a:srgbClr val="FFFFFF"/>
+                </a:solidFill>
+              </a:defRPr>
+            </a:pPr>
+            <a:r>
+              <a:t>• Pre-flight battery and waypoint corridor clearance tracking.</a:t>
+            </a:r>
+          </a:p>
+        </p:txBody>
+      </p:sp>
+      <p:sp>
+        <p:nvSpPr>
+          <p:cNvPr id="9" name="Rounded Rectangle 8"/>
+          <p:cNvSpPr/>
+          <p:nvPr/>
+        </p:nvSpPr>
+        <p:spPr>
+          <a:xfrm>
+            <a:off x="731520" y="3931920"/>
+            <a:ext cx="5120640" cy="2011680"/>
           </a:xfrm>
           <a:prstGeom prst="roundRect">
             <a:avLst/>
@@ -6019,14 +7593,14 @@
       </p:sp>
       <p:sp>
         <p:nvSpPr>
-          <p:cNvPr id="8" name="TextBox 7"/>
+          <p:cNvPr id="10" name="TextBox 9"/>
           <p:cNvSpPr txBox="1"/>
           <p:nvPr/>
         </p:nvSpPr>
         <p:spPr>
           <a:xfrm>
-            <a:off x="960120" y="3264408"/>
-            <a:ext cx="10241280" cy="1097280"/>
+            <a:off x="914400" y="4069080"/>
+            <a:ext cx="4754880" cy="1737360"/>
           </a:xfrm>
           <a:prstGeom prst="rect">
             <a:avLst/>
@@ -6047,7 +7621,7 @@
               </a:defRPr>
             </a:pPr>
             <a:r>
-              <a:t>🏢 Phase 2: State-Wide Rollout (Next 6 Months)</a:t>
+              <a:t>🔄 Dynamic Incident Reroute Simulator</a:t>
             </a:r>
           </a:p>
           <a:p>
@@ -6062,7 +7636,7 @@
               </a:defRPr>
             </a:pPr>
             <a:r>
-              <a:t>• Integration with State Medical Services Corporations (e.g. MP-MSCL, KMSCL).</a:t>
+              <a:t>• Simulates highway roadblocks, flash floods, or landslides.</a:t>
             </a:r>
           </a:p>
           <a:p>
@@ -6077,7 +7651,7 @@
               </a:defRPr>
             </a:pPr>
             <a:r>
-              <a:t>• Automated GPS drone and courier dispatch integration.</a:t>
+              <a:t>• Recalculates alternative transit detours in real time.</a:t>
             </a:r>
           </a:p>
           <a:p>
@@ -6092,21 +7666,36 @@
               </a:defRPr>
             </a:pPr>
             <a:r>
-              <a:t>• Real-time eVIN cold-chain temperature sensor streaming.</a:t>
-            </a:r>
-          </a:p>
-        </p:txBody>
-      </p:sp>
-      <p:sp>
-        <p:nvSpPr>
-          <p:cNvPr id="9" name="Rounded Rectangle 8"/>
+              <a:t>• Prevents transit delays for critical life-saving dispatches.</a:t>
+            </a:r>
+          </a:p>
+          <a:p>
+            <a:pPr>
+              <a:spcBef>
+                <a:spcPts val="200"/>
+              </a:spcBef>
+              <a:defRPr sz="1100">
+                <a:solidFill>
+                  <a:srgbClr val="FFFFFF"/>
+                </a:solidFill>
+              </a:defRPr>
+            </a:pPr>
+            <a:r>
+              <a:t>• Provides turn-by-turn navigation guidance for drivers.</a:t>
+            </a:r>
+          </a:p>
+        </p:txBody>
+      </p:sp>
+      <p:sp>
+        <p:nvSpPr>
+          <p:cNvPr id="11" name="Rounded Rectangle 10"/>
           <p:cNvSpPr/>
           <p:nvPr/>
         </p:nvSpPr>
         <p:spPr>
           <a:xfrm>
-            <a:off x="731520" y="4663440"/>
-            <a:ext cx="10698480" cy="1325880"/>
+            <a:off x="6126480" y="3931920"/>
+            <a:ext cx="5120640" cy="2011680"/>
           </a:xfrm>
           <a:prstGeom prst="roundRect">
             <a:avLst/>
@@ -6116,7 +7705,7 @@
           </a:solidFill>
           <a:ln w="19050">
             <a:solidFill>
-              <a:srgbClr val="FFFFFF"/>
+              <a:srgbClr val="DC2626"/>
             </a:solidFill>
           </a:ln>
         </p:spPr>
@@ -6144,14 +7733,14 @@
       </p:sp>
       <p:sp>
         <p:nvSpPr>
-          <p:cNvPr id="10" name="TextBox 9"/>
+          <p:cNvPr id="12" name="TextBox 11"/>
           <p:cNvSpPr txBox="1"/>
           <p:nvPr/>
         </p:nvSpPr>
         <p:spPr>
           <a:xfrm>
-            <a:off x="960120" y="4773168"/>
-            <a:ext cx="10241280" cy="1097280"/>
+            <a:off x="6309360" y="4069080"/>
+            <a:ext cx="4754880" cy="1737360"/>
           </a:xfrm>
           <a:prstGeom prst="rect">
             <a:avLst/>
@@ -6167,12 +7756,12 @@
             <a:pPr>
               <a:defRPr sz="1500" b="1">
                 <a:solidFill>
-                  <a:srgbClr val="FFFFFF"/>
-                </a:solidFill>
-              </a:defRPr>
-            </a:pPr>
-            <a:r>
-              <a:t>🌐 Phase 3: National Scale (Next 12-24 Months)</a:t>
+                  <a:srgbClr val="DC2626"/>
+                </a:solidFill>
+              </a:defRPr>
+            </a:pPr>
+            <a:r>
+              <a:t>🚨 Emergency Green Corridors</a:t>
             </a:r>
           </a:p>
           <a:p>
@@ -6187,7 +7776,7 @@
               </a:defRPr>
             </a:pPr>
             <a:r>
-              <a:t>• Pan-India scaling across 25,000+ PHCs &amp; 5,000+ CHCs.</a:t>
+              <a:t>• Integrates with National Emergency Mode (`#/portal/emergency`).</a:t>
             </a:r>
           </a:p>
           <a:p>
@@ -6202,7 +7791,7 @@
               </a:defRPr>
             </a:pPr>
             <a:r>
-              <a:t>• Full ABDM Unified Health Interface (UHI) interoperability.</a:t>
+              <a:t>• Grants highest priority to disaster casualty transit.</a:t>
             </a:r>
           </a:p>
           <a:p>
@@ -6217,7 +7806,22 @@
               </a:defRPr>
             </a:pPr>
             <a:r>
-              <a:t>• Cross-state emergency pharmaceutical disaster corridors.</a:t>
+              <a:t>• Automated coordination with police and highway authorities.</a:t>
+            </a:r>
+          </a:p>
+          <a:p>
+            <a:pPr>
+              <a:spcBef>
+                <a:spcPts val="200"/>
+              </a:spcBef>
+              <a:defRPr sz="1100">
+                <a:solidFill>
+                  <a:srgbClr val="FFFFFF"/>
+                </a:solidFill>
+              </a:defRPr>
+            </a:pPr>
+            <a:r>
+              <a:t>• Real-time GPS telemetry streaming.</a:t>
             </a:r>
           </a:p>
         </p:txBody>
@@ -6313,7 +7917,7 @@
               </a:defRPr>
             </a:pPr>
             <a:r>
-              <a:t>TECHNOLOGY STACK</a:t>
+              <a:t>ARCHITECTURE &amp; PRIVACY</a:t>
             </a:r>
           </a:p>
         </p:txBody>
@@ -6348,7 +7952,7 @@
               </a:defRPr>
             </a:pPr>
             <a:r>
-              <a:t>Full-Stack Technology Architecture</a:t>
+              <a:t>Architectural Resilience: Edge Offline Mode &amp; Federated Privacy</a:t>
             </a:r>
           </a:p>
         </p:txBody>
@@ -6362,7 +7966,7 @@
         <p:spPr>
           <a:xfrm>
             <a:off x="731520" y="1645920"/>
-            <a:ext cx="5120640" cy="2011680"/>
+            <a:ext cx="5120640" cy="4389120"/>
           </a:xfrm>
           <a:prstGeom prst="roundRect">
             <a:avLst/>
@@ -6406,8 +8010,8 @@
         </p:nvSpPr>
         <p:spPr>
           <a:xfrm>
-            <a:off x="914400" y="1783080"/>
-            <a:ext cx="4754880" cy="1737360"/>
+            <a:off x="914400" y="1828800"/>
+            <a:ext cx="4754880" cy="4023360"/>
           </a:xfrm>
           <a:prstGeom prst="rect">
             <a:avLst/>
@@ -6421,89 +8025,89 @@
           <a:lstStyle/>
           <a:p>
             <a:pPr>
-              <a:defRPr sz="1500" b="1">
+              <a:defRPr sz="1800" b="1">
                 <a:solidFill>
                   <a:srgbClr val="16A34A"/>
                 </a:solidFill>
               </a:defRPr>
             </a:pPr>
             <a:r>
-              <a:t>🎨 Frontend Tier</a:t>
-            </a:r>
-          </a:p>
-          <a:p>
-            <a:pPr>
-              <a:spcBef>
-                <a:spcPts val="200"/>
-              </a:spcBef>
-              <a:defRPr sz="1100">
-                <a:solidFill>
-                  <a:srgbClr val="FFFFFF"/>
-                </a:solidFill>
-              </a:defRPr>
-            </a:pPr>
-            <a:r>
-              <a:t>• React 18 + Vite SPA</a:t>
-            </a:r>
-          </a:p>
-          <a:p>
-            <a:pPr>
-              <a:spcBef>
-                <a:spcPts val="200"/>
-              </a:spcBef>
-              <a:defRPr sz="1100">
-                <a:solidFill>
-                  <a:srgbClr val="FFFFFF"/>
-                </a:solidFill>
-              </a:defRPr>
-            </a:pPr>
-            <a:r>
-              <a:t>• Clean Glassmorphism UI</a:t>
-            </a:r>
-          </a:p>
-          <a:p>
-            <a:pPr>
-              <a:spcBef>
-                <a:spcPts val="200"/>
-              </a:spcBef>
-              <a:defRPr sz="1100">
-                <a:solidFill>
-                  <a:srgbClr val="FFFFFF"/>
-                </a:solidFill>
-              </a:defRPr>
-            </a:pPr>
-            <a:r>
-              <a:t>• White/Red/Green/Orange Palette</a:t>
-            </a:r>
-          </a:p>
-          <a:p>
-            <a:pPr>
-              <a:spcBef>
-                <a:spcPts val="200"/>
-              </a:spcBef>
-              <a:defRPr sz="1100">
-                <a:solidFill>
-                  <a:srgbClr val="FFFFFF"/>
-                </a:solidFill>
-              </a:defRPr>
-            </a:pPr>
-            <a:r>
-              <a:t>• Lucide Icons + Leaflet Maps</a:t>
-            </a:r>
-          </a:p>
-          <a:p>
-            <a:pPr>
-              <a:spcBef>
-                <a:spcPts val="200"/>
-              </a:spcBef>
-              <a:defRPr sz="1100">
-                <a:solidFill>
-                  <a:srgbClr val="FFFFFF"/>
-                </a:solidFill>
-              </a:defRPr>
-            </a:pPr>
-            <a:r>
-              <a:t>• 11 Regional Languages i18n</a:t>
+              <a:t>📱 Zero-Bandwidth Offline Rural Edge</a:t>
+            </a:r>
+          </a:p>
+          <a:p>
+            <a:pPr>
+              <a:spcBef>
+                <a:spcPts val="800"/>
+              </a:spcBef>
+              <a:defRPr sz="1200">
+                <a:solidFill>
+                  <a:srgbClr val="FFFFFF"/>
+                </a:solidFill>
+              </a:defRPr>
+            </a:pPr>
+            <a:r>
+              <a:t>• Runs on low-cost Android tablets, smartphones, and legacy desktop PCs.</a:t>
+            </a:r>
+          </a:p>
+          <a:p>
+            <a:pPr>
+              <a:spcBef>
+                <a:spcPts val="800"/>
+              </a:spcBef>
+              <a:defRPr sz="1200">
+                <a:solidFill>
+                  <a:srgbClr val="FFFFFF"/>
+                </a:solidFill>
+              </a:defRPr>
+            </a:pPr>
+            <a:r>
+              <a:t>• Uses browser IndexedDB and LocalStorage caching for 100% offline uptime.</a:t>
+            </a:r>
+          </a:p>
+          <a:p>
+            <a:pPr>
+              <a:spcBef>
+                <a:spcPts val="800"/>
+              </a:spcBef>
+              <a:defRPr sz="1200">
+                <a:solidFill>
+                  <a:srgbClr val="FFFFFF"/>
+                </a:solidFill>
+              </a:defRPr>
+            </a:pPr>
+            <a:r>
+              <a:t>• Rural doctors log patient visits, medicine dispensing, and local stock with zero internet.</a:t>
+            </a:r>
+          </a:p>
+          <a:p>
+            <a:pPr>
+              <a:spcBef>
+                <a:spcPts val="800"/>
+              </a:spcBef>
+              <a:defRPr sz="1200">
+                <a:solidFill>
+                  <a:srgbClr val="FFFFFF"/>
+                </a:solidFill>
+              </a:defRPr>
+            </a:pPr>
+            <a:r>
+              <a:t>• Auto-Sync Engine automatically pushes queued delta payloads upon reconnection.</a:t>
+            </a:r>
+          </a:p>
+          <a:p>
+            <a:pPr>
+              <a:spcBef>
+                <a:spcPts val="800"/>
+              </a:spcBef>
+              <a:defRPr sz="1200">
+                <a:solidFill>
+                  <a:srgbClr val="FFFFFF"/>
+                </a:solidFill>
+              </a:defRPr>
+            </a:pPr>
+            <a:r>
+              <a:t>• Conflict-free transactional batch reconciliation at backend.</a:t>
             </a:r>
           </a:p>
         </p:txBody>
@@ -6516,163 +8120,8 @@
         </p:nvSpPr>
         <p:spPr>
           <a:xfrm>
-            <a:off x="6126480" y="1645920"/>
-            <a:ext cx="5120640" cy="2011680"/>
-          </a:xfrm>
-          <a:prstGeom prst="roundRect">
-            <a:avLst/>
-          </a:prstGeom>
-          <a:solidFill>
-            <a:srgbClr val="1E293B"/>
-          </a:solidFill>
-          <a:ln w="19050">
-            <a:solidFill>
-              <a:srgbClr val="16A34A"/>
-            </a:solidFill>
-          </a:ln>
-        </p:spPr>
-        <p:style>
-          <a:lnRef idx="1">
-            <a:schemeClr val="accent1"/>
-          </a:lnRef>
-          <a:fillRef idx="3">
-            <a:schemeClr val="accent1"/>
-          </a:fillRef>
-          <a:effectRef idx="2">
-            <a:schemeClr val="accent1"/>
-          </a:effectRef>
-          <a:fontRef idx="minor">
-            <a:schemeClr val="lt1"/>
-          </a:fontRef>
-        </p:style>
-        <p:txBody>
-          <a:bodyPr rtlCol="0" anchor="ctr"/>
-          <a:lstStyle/>
-          <a:p>
-            <a:pPr algn="ctr"/>
-          </a:p>
-        </p:txBody>
-      </p:sp>
-      <p:sp>
-        <p:nvSpPr>
-          <p:cNvPr id="8" name="TextBox 7"/>
-          <p:cNvSpPr txBox="1"/>
-          <p:nvPr/>
-        </p:nvSpPr>
-        <p:spPr>
-          <a:xfrm>
-            <a:off x="6309360" y="1783080"/>
-            <a:ext cx="4754880" cy="1737360"/>
-          </a:xfrm>
-          <a:prstGeom prst="rect">
-            <a:avLst/>
-          </a:prstGeom>
-          <a:noFill/>
-        </p:spPr>
-        <p:txBody>
-          <a:bodyPr wrap="square">
-            <a:spAutoFit/>
-          </a:bodyPr>
-          <a:lstStyle/>
-          <a:p>
-            <a:pPr>
-              <a:defRPr sz="1500" b="1">
-                <a:solidFill>
-                  <a:srgbClr val="16A34A"/>
-                </a:solidFill>
-              </a:defRPr>
-            </a:pPr>
-            <a:r>
-              <a:t>⚙️ Backend Core</a:t>
-            </a:r>
-          </a:p>
-          <a:p>
-            <a:pPr>
-              <a:spcBef>
-                <a:spcPts val="200"/>
-              </a:spcBef>
-              <a:defRPr sz="1100">
-                <a:solidFill>
-                  <a:srgbClr val="FFFFFF"/>
-                </a:solidFill>
-              </a:defRPr>
-            </a:pPr>
-            <a:r>
-              <a:t>• FastAPI (Python 3.10+)</a:t>
-            </a:r>
-          </a:p>
-          <a:p>
-            <a:pPr>
-              <a:spcBef>
-                <a:spcPts val="200"/>
-              </a:spcBef>
-              <a:defRPr sz="1100">
-                <a:solidFill>
-                  <a:srgbClr val="FFFFFF"/>
-                </a:solidFill>
-              </a:defRPr>
-            </a:pPr>
-            <a:r>
-              <a:t>• SQLAlchemy ORM + SQLite/PG</a:t>
-            </a:r>
-          </a:p>
-          <a:p>
-            <a:pPr>
-              <a:spcBef>
-                <a:spcPts val="200"/>
-              </a:spcBef>
-              <a:defRPr sz="1100">
-                <a:solidFill>
-                  <a:srgbClr val="FFFFFF"/>
-                </a:solidFill>
-              </a:defRPr>
-            </a:pPr>
-            <a:r>
-              <a:t>• Pydantic Request Schemas</a:t>
-            </a:r>
-          </a:p>
-          <a:p>
-            <a:pPr>
-              <a:spcBef>
-                <a:spcPts val="200"/>
-              </a:spcBef>
-              <a:defRPr sz="1100">
-                <a:solidFill>
-                  <a:srgbClr val="FFFFFF"/>
-                </a:solidFill>
-              </a:defRPr>
-            </a:pPr>
-            <a:r>
-              <a:t>• Uvicorn Async Worker</a:t>
-            </a:r>
-          </a:p>
-          <a:p>
-            <a:pPr>
-              <a:spcBef>
-                <a:spcPts val="200"/>
-              </a:spcBef>
-              <a:defRPr sz="1100">
-                <a:solidFill>
-                  <a:srgbClr val="FFFFFF"/>
-                </a:solidFill>
-              </a:defRPr>
-            </a:pPr>
-            <a:r>
-              <a:t>• RESTful Modular Architecture</a:t>
-            </a:r>
-          </a:p>
-        </p:txBody>
-      </p:sp>
-      <p:sp>
-        <p:nvSpPr>
-          <p:cNvPr id="9" name="Rounded Rectangle 8"/>
-          <p:cNvSpPr/>
-          <p:nvPr/>
-        </p:nvSpPr>
-        <p:spPr>
-          <a:xfrm>
-            <a:off x="731520" y="3931920"/>
-            <a:ext cx="5120640" cy="2011680"/>
+            <a:off x="6217920" y="1645920"/>
+            <a:ext cx="5212080" cy="4389120"/>
           </a:xfrm>
           <a:prstGeom prst="roundRect">
             <a:avLst/>
@@ -6710,14 +8159,14 @@
       </p:sp>
       <p:sp>
         <p:nvSpPr>
-          <p:cNvPr id="10" name="TextBox 9"/>
+          <p:cNvPr id="8" name="TextBox 7"/>
           <p:cNvSpPr txBox="1"/>
           <p:nvPr/>
         </p:nvSpPr>
         <p:spPr>
           <a:xfrm>
-            <a:off x="914400" y="4069080"/>
-            <a:ext cx="4754880" cy="1737360"/>
+            <a:off x="6400800" y="1828800"/>
+            <a:ext cx="4846320" cy="4023360"/>
           </a:xfrm>
           <a:prstGeom prst="rect">
             <a:avLst/>
@@ -6731,244 +8180,89 @@
           <a:lstStyle/>
           <a:p>
             <a:pPr>
-              <a:defRPr sz="1500" b="1">
+              <a:defRPr sz="1800" b="1">
                 <a:solidFill>
                   <a:srgbClr val="EA580C"/>
                 </a:solidFill>
               </a:defRPr>
             </a:pPr>
             <a:r>
-              <a:t>🧠 AI &amp; Optimization</a:t>
-            </a:r>
-          </a:p>
-          <a:p>
-            <a:pPr>
-              <a:spcBef>
-                <a:spcPts val="200"/>
-              </a:spcBef>
-              <a:defRPr sz="1100">
-                <a:solidFill>
-                  <a:srgbClr val="FFFFFF"/>
-                </a:solidFill>
-              </a:defRPr>
-            </a:pPr>
-            <a:r>
-              <a:t>• PuLP MILP Linear Optimizer</a:t>
-            </a:r>
-          </a:p>
-          <a:p>
-            <a:pPr>
-              <a:spcBef>
-                <a:spcPts val="200"/>
-              </a:spcBef>
-              <a:defRPr sz="1100">
-                <a:solidFill>
-                  <a:srgbClr val="FFFFFF"/>
-                </a:solidFill>
-              </a:defRPr>
-            </a:pPr>
-            <a:r>
-              <a:t>• Haversine Geospatial Vectors</a:t>
-            </a:r>
-          </a:p>
-          <a:p>
-            <a:pPr>
-              <a:spcBef>
-                <a:spcPts val="200"/>
-              </a:spcBef>
-              <a:defRPr sz="1100">
-                <a:solidFill>
-                  <a:srgbClr val="FFFFFF"/>
-                </a:solidFill>
-              </a:defRPr>
-            </a:pPr>
-            <a:r>
-              <a:t>• Poisson Footfall Modeling</a:t>
-            </a:r>
-          </a:p>
-          <a:p>
-            <a:pPr>
-              <a:spcBef>
-                <a:spcPts val="200"/>
-              </a:spcBef>
-              <a:defRPr sz="1100">
-                <a:solidFill>
-                  <a:srgbClr val="FFFFFF"/>
-                </a:solidFill>
-              </a:defRPr>
-            </a:pPr>
-            <a:r>
-              <a:t>• FedAvg Federated Learning</a:t>
-            </a:r>
-          </a:p>
-          <a:p>
-            <a:pPr>
-              <a:spcBef>
-                <a:spcPts val="200"/>
-              </a:spcBef>
-              <a:defRPr sz="1100">
-                <a:solidFill>
-                  <a:srgbClr val="FFFFFF"/>
-                </a:solidFill>
-              </a:defRPr>
-            </a:pPr>
-            <a:r>
-              <a:t>• Confidence Interval Predictors</a:t>
-            </a:r>
-          </a:p>
-        </p:txBody>
-      </p:sp>
-      <p:sp>
-        <p:nvSpPr>
-          <p:cNvPr id="11" name="Rounded Rectangle 10"/>
-          <p:cNvSpPr/>
-          <p:nvPr/>
-        </p:nvSpPr>
-        <p:spPr>
-          <a:xfrm>
-            <a:off x="6126480" y="3931920"/>
-            <a:ext cx="5120640" cy="2011680"/>
-          </a:xfrm>
-          <a:prstGeom prst="roundRect">
-            <a:avLst/>
-          </a:prstGeom>
-          <a:solidFill>
-            <a:srgbClr val="1E293B"/>
-          </a:solidFill>
-          <a:ln w="19050">
-            <a:solidFill>
-              <a:srgbClr val="EA580C"/>
-            </a:solidFill>
-          </a:ln>
-        </p:spPr>
-        <p:style>
-          <a:lnRef idx="1">
-            <a:schemeClr val="accent1"/>
-          </a:lnRef>
-          <a:fillRef idx="3">
-            <a:schemeClr val="accent1"/>
-          </a:fillRef>
-          <a:effectRef idx="2">
-            <a:schemeClr val="accent1"/>
-          </a:effectRef>
-          <a:fontRef idx="minor">
-            <a:schemeClr val="lt1"/>
-          </a:fontRef>
-        </p:style>
-        <p:txBody>
-          <a:bodyPr rtlCol="0" anchor="ctr"/>
-          <a:lstStyle/>
-          <a:p>
-            <a:pPr algn="ctr"/>
-          </a:p>
-        </p:txBody>
-      </p:sp>
-      <p:sp>
-        <p:nvSpPr>
-          <p:cNvPr id="12" name="TextBox 11"/>
-          <p:cNvSpPr txBox="1"/>
-          <p:nvPr/>
-        </p:nvSpPr>
-        <p:spPr>
-          <a:xfrm>
-            <a:off x="6309360" y="4069080"/>
-            <a:ext cx="4754880" cy="1737360"/>
-          </a:xfrm>
-          <a:prstGeom prst="rect">
-            <a:avLst/>
-          </a:prstGeom>
-          <a:noFill/>
-        </p:spPr>
-        <p:txBody>
-          <a:bodyPr wrap="square">
-            <a:spAutoFit/>
-          </a:bodyPr>
-          <a:lstStyle/>
-          <a:p>
-            <a:pPr>
-              <a:defRPr sz="1500" b="1">
-                <a:solidFill>
-                  <a:srgbClr val="EA580C"/>
-                </a:solidFill>
-              </a:defRPr>
-            </a:pPr>
-            <a:r>
-              <a:t>📦 Edge &amp; Integrations</a:t>
-            </a:r>
-          </a:p>
-          <a:p>
-            <a:pPr>
-              <a:spcBef>
-                <a:spcPts val="200"/>
-              </a:spcBef>
-              <a:defRPr sz="1100">
-                <a:solidFill>
-                  <a:srgbClr val="FFFFFF"/>
-                </a:solidFill>
-              </a:defRPr>
-            </a:pPr>
-            <a:r>
-              <a:t>• IndexedDB / LocalStorage Sync</a:t>
-            </a:r>
-          </a:p>
-          <a:p>
-            <a:pPr>
-              <a:spcBef>
-                <a:spcPts val="200"/>
-              </a:spcBef>
-              <a:defRPr sz="1100">
-                <a:solidFill>
-                  <a:srgbClr val="FFFFFF"/>
-                </a:solidFill>
-              </a:defRPr>
-            </a:pPr>
-            <a:r>
-              <a:t>• ABDM Facility Registry M1-M3</a:t>
-            </a:r>
-          </a:p>
-          <a:p>
-            <a:pPr>
-              <a:spcBef>
-                <a:spcPts val="200"/>
-              </a:spcBef>
-              <a:defRPr sz="1100">
-                <a:solidFill>
-                  <a:srgbClr val="FFFFFF"/>
-                </a:solidFill>
-              </a:defRPr>
-            </a:pPr>
-            <a:r>
-              <a:t>• eVIN IoT Cold-Chain Ingestion</a:t>
-            </a:r>
-          </a:p>
-          <a:p>
-            <a:pPr>
-              <a:spcBef>
-                <a:spcPts val="200"/>
-              </a:spcBef>
-              <a:defRPr sz="1100">
-                <a:solidFill>
-                  <a:srgbClr val="FFFFFF"/>
-                </a:solidFill>
-              </a:defRPr>
-            </a:pPr>
-            <a:r>
-              <a:t>• HMIS Disease Data Ingestion</a:t>
-            </a:r>
-          </a:p>
-          <a:p>
-            <a:pPr>
-              <a:spcBef>
-                <a:spcPts val="200"/>
-              </a:spcBef>
-              <a:defRPr sz="1100">
-                <a:solidFill>
-                  <a:srgbClr val="FFFFFF"/>
-                </a:solidFill>
-              </a:defRPr>
-            </a:pPr>
-            <a:r>
-              <a:t>• Zero-Bandwidth Offline Mode</a:t>
+              <a:t>🔒 Privacy-Preserving Federated Learning</a:t>
+            </a:r>
+          </a:p>
+          <a:p>
+            <a:pPr>
+              <a:spcBef>
+                <a:spcPts val="800"/>
+              </a:spcBef>
+              <a:defRPr sz="1200">
+                <a:solidFill>
+                  <a:srgbClr val="FFFFFF"/>
+                </a:solidFill>
+              </a:defRPr>
+            </a:pPr>
+            <a:r>
+              <a:t>• 100% compliant with India's DPDP Act 2023 and DISHA healthcare privacy rules.</a:t>
+            </a:r>
+          </a:p>
+          <a:p>
+            <a:pPr>
+              <a:spcBef>
+                <a:spcPts val="800"/>
+              </a:spcBef>
+              <a:defRPr sz="1200">
+                <a:solidFill>
+                  <a:srgbClr val="FFFFFF"/>
+                </a:solidFill>
+              </a:defRPr>
+            </a:pPr>
+            <a:r>
+              <a:t>• Local state nodes train ML models locally on regional clinical trends.</a:t>
+            </a:r>
+          </a:p>
+          <a:p>
+            <a:pPr>
+              <a:spcBef>
+                <a:spcPts val="800"/>
+              </a:spcBef>
+              <a:defRPr sz="1200">
+                <a:solidFill>
+                  <a:srgbClr val="FFFFFF"/>
+                </a:solidFill>
+              </a:defRPr>
+            </a:pPr>
+            <a:r>
+              <a:t>• Only mathematical model weight vectors (ΔW) transmitted to central server.</a:t>
+            </a:r>
+          </a:p>
+          <a:p>
+            <a:pPr>
+              <a:spcBef>
+                <a:spcPts val="800"/>
+              </a:spcBef>
+              <a:defRPr sz="1200">
+                <a:solidFill>
+                  <a:srgbClr val="FFFFFF"/>
+                </a:solidFill>
+              </a:defRPr>
+            </a:pPr>
+            <a:r>
+              <a:t>• Central coordinator executes Federated Averaging (FedAvg) aggregation.</a:t>
+            </a:r>
+          </a:p>
+          <a:p>
+            <a:pPr>
+              <a:spcBef>
+                <a:spcPts val="800"/>
+              </a:spcBef>
+              <a:defRPr sz="1200">
+                <a:solidFill>
+                  <a:srgbClr val="FFFFFF"/>
+                </a:solidFill>
+              </a:defRPr>
+            </a:pPr>
+            <a:r>
+              <a:t>• Zero raw patient medical records ever leave the local clinic boundary.</a:t>
             </a:r>
           </a:p>
         </p:txBody>
@@ -7064,7 +8358,7 @@
               </a:defRPr>
             </a:pPr>
             <a:r>
-              <a:t>CONCLUSION &amp; DEMO</a:t>
+              <a:t>FEASIBILITY &amp; GOVERNANCE</a:t>
             </a:r>
           </a:p>
         </p:txBody>
@@ -7099,7 +8393,7 @@
               </a:defRPr>
             </a:pPr>
             <a:r>
-              <a:t>Project Links, Source Code &amp; Development Team</a:t>
+              <a:t>Visibility, Transparency &amp; Feasibility Analysis</a:t>
             </a:r>
           </a:p>
         </p:txBody>
@@ -7113,7 +8407,7 @@
         <p:spPr>
           <a:xfrm>
             <a:off x="731520" y="1645920"/>
-            <a:ext cx="5120640" cy="4389120"/>
+            <a:ext cx="5120640" cy="2011680"/>
           </a:xfrm>
           <a:prstGeom prst="roundRect">
             <a:avLst/>
@@ -7157,8 +8451,8 @@
         </p:nvSpPr>
         <p:spPr>
           <a:xfrm>
-            <a:off x="914400" y="1828800"/>
-            <a:ext cx="4754880" cy="4023360"/>
+            <a:off x="914400" y="1783080"/>
+            <a:ext cx="4754880" cy="1737360"/>
           </a:xfrm>
           <a:prstGeom prst="rect">
             <a:avLst/>
@@ -7172,95 +8466,74 @@
           <a:lstStyle/>
           <a:p>
             <a:pPr>
-              <a:defRPr sz="1800" b="1">
+              <a:defRPr sz="1500" b="1">
                 <a:solidFill>
                   <a:srgbClr val="16A34A"/>
                 </a:solidFill>
               </a:defRPr>
             </a:pPr>
             <a:r>
-              <a:t>👥 Core Development Team</a:t>
-            </a:r>
-          </a:p>
-          <a:p>
-            <a:pPr>
-              <a:spcBef>
-                <a:spcPts val="800"/>
-              </a:spcBef>
-              <a:defRPr sz="1300" b="1">
-                <a:solidFill>
-                  <a:srgbClr val="FFFFFF"/>
-                </a:solidFill>
-              </a:defRPr>
-            </a:pPr>
-            <a:r>
-              <a:t>• Rudra Pratap Chaurasiya (CSJMU Kanpur)</a:t>
-            </a:r>
-          </a:p>
-          <a:p>
-            <a:pPr>
+              <a:t>👁️ Real-Time Visibility</a:t>
+            </a:r>
+          </a:p>
+          <a:p>
+            <a:pPr>
+              <a:spcBef>
+                <a:spcPts val="300"/>
+              </a:spcBef>
               <a:defRPr sz="1100">
                 <a:solidFill>
-                  <a:srgbClr val="94A3B8"/>
-                </a:solidFill>
-              </a:defRPr>
-            </a:pPr>
-            <a:r>
-              <a:t>  Role: Full Stack AI Architecture &amp; ML Engines</a:t>
-            </a:r>
-          </a:p>
-          <a:p>
-            <a:pPr>
-              <a:spcBef>
-                <a:spcPts val="800"/>
-              </a:spcBef>
-              <a:defRPr sz="1300" b="1">
-                <a:solidFill>
-                  <a:srgbClr val="FFFFFF"/>
-                </a:solidFill>
-              </a:defRPr>
-            </a:pPr>
-            <a:r>
-              <a:t>• Sankalp Sachan (CSJMU Kanpur)</a:t>
-            </a:r>
-          </a:p>
-          <a:p>
-            <a:pPr>
+                  <a:srgbClr val="FFFFFF"/>
+                </a:solidFill>
+              </a:defRPr>
+            </a:pPr>
+            <a:r>
+              <a:t>• National, State, District &amp; PHC multi-level dashboards.</a:t>
+            </a:r>
+          </a:p>
+          <a:p>
+            <a:pPr>
+              <a:spcBef>
+                <a:spcPts val="300"/>
+              </a:spcBef>
               <a:defRPr sz="1100">
                 <a:solidFill>
-                  <a:srgbClr val="94A3B8"/>
-                </a:solidFill>
-              </a:defRPr>
-            </a:pPr>
-            <a:r>
-              <a:t>  Role: Backend Services &amp; Linear Optimization</a:t>
-            </a:r>
-          </a:p>
-          <a:p>
-            <a:pPr>
-              <a:spcBef>
-                <a:spcPts val="800"/>
-              </a:spcBef>
-              <a:defRPr sz="1300" b="1">
-                <a:solidFill>
-                  <a:srgbClr val="FFFFFF"/>
-                </a:solidFill>
-              </a:defRPr>
-            </a:pPr>
-            <a:r>
-              <a:t>• Mohammad Sirfan (CSJMU Kanpur)</a:t>
-            </a:r>
-          </a:p>
-          <a:p>
-            <a:pPr>
+                  <a:srgbClr val="FFFFFF"/>
+                </a:solidFill>
+              </a:defRPr>
+            </a:pPr>
+            <a:r>
+              <a:t>• Live Days of Supply Remaining (DoSR) indicators.</a:t>
+            </a:r>
+          </a:p>
+          <a:p>
+            <a:pPr>
+              <a:spcBef>
+                <a:spcPts val="300"/>
+              </a:spcBef>
               <a:defRPr sz="1100">
                 <a:solidFill>
-                  <a:srgbClr val="94A3B8"/>
-                </a:solidFill>
-              </a:defRPr>
-            </a:pPr>
-            <a:r>
-              <a:t>  Role: Frontend UI/UX &amp; Multilingual Edge Sync</a:t>
+                  <a:srgbClr val="FFFFFF"/>
+                </a:solidFill>
+              </a:defRPr>
+            </a:pPr>
+            <a:r>
+              <a:t>• Interactive geospatial heatmaps of vulnerable clinics.</a:t>
+            </a:r>
+          </a:p>
+          <a:p>
+            <a:pPr>
+              <a:spcBef>
+                <a:spcPts val="300"/>
+              </a:spcBef>
+              <a:defRPr sz="1100">
+                <a:solidFill>
+                  <a:srgbClr val="FFFFFF"/>
+                </a:solidFill>
+              </a:defRPr>
+            </a:pPr>
+            <a:r>
+              <a:t>• Audit trail for every medicine batch &amp; transfer order.</a:t>
             </a:r>
           </a:p>
         </p:txBody>
@@ -7273,8 +8546,148 @@
         </p:nvSpPr>
         <p:spPr>
           <a:xfrm>
-            <a:off x="6217920" y="1645920"/>
-            <a:ext cx="5212080" cy="4389120"/>
+            <a:off x="6126480" y="1645920"/>
+            <a:ext cx="5120640" cy="2011680"/>
+          </a:xfrm>
+          <a:prstGeom prst="roundRect">
+            <a:avLst/>
+          </a:prstGeom>
+          <a:solidFill>
+            <a:srgbClr val="1E293B"/>
+          </a:solidFill>
+          <a:ln w="19050">
+            <a:solidFill>
+              <a:srgbClr val="16A34A"/>
+            </a:solidFill>
+          </a:ln>
+        </p:spPr>
+        <p:style>
+          <a:lnRef idx="1">
+            <a:schemeClr val="accent1"/>
+          </a:lnRef>
+          <a:fillRef idx="3">
+            <a:schemeClr val="accent1"/>
+          </a:fillRef>
+          <a:effectRef idx="2">
+            <a:schemeClr val="accent1"/>
+          </a:effectRef>
+          <a:fontRef idx="minor">
+            <a:schemeClr val="lt1"/>
+          </a:fontRef>
+        </p:style>
+        <p:txBody>
+          <a:bodyPr rtlCol="0" anchor="ctr"/>
+          <a:lstStyle/>
+          <a:p>
+            <a:pPr algn="ctr"/>
+          </a:p>
+        </p:txBody>
+      </p:sp>
+      <p:sp>
+        <p:nvSpPr>
+          <p:cNvPr id="8" name="TextBox 7"/>
+          <p:cNvSpPr txBox="1"/>
+          <p:nvPr/>
+        </p:nvSpPr>
+        <p:spPr>
+          <a:xfrm>
+            <a:off x="6309360" y="1783080"/>
+            <a:ext cx="4754880" cy="1737360"/>
+          </a:xfrm>
+          <a:prstGeom prst="rect">
+            <a:avLst/>
+          </a:prstGeom>
+          <a:noFill/>
+        </p:spPr>
+        <p:txBody>
+          <a:bodyPr wrap="square">
+            <a:spAutoFit/>
+          </a:bodyPr>
+          <a:lstStyle/>
+          <a:p>
+            <a:pPr>
+              <a:defRPr sz="1500" b="1">
+                <a:solidFill>
+                  <a:srgbClr val="16A34A"/>
+                </a:solidFill>
+              </a:defRPr>
+            </a:pPr>
+            <a:r>
+              <a:t>⚙️ Technical Feasibility</a:t>
+            </a:r>
+          </a:p>
+          <a:p>
+            <a:pPr>
+              <a:spcBef>
+                <a:spcPts val="300"/>
+              </a:spcBef>
+              <a:defRPr sz="1100">
+                <a:solidFill>
+                  <a:srgbClr val="FFFFFF"/>
+                </a:solidFill>
+              </a:defRPr>
+            </a:pPr>
+            <a:r>
+              <a:t>• Lightweight FastAPI backend with SQLite/PostgreSQL.</a:t>
+            </a:r>
+          </a:p>
+          <a:p>
+            <a:pPr>
+              <a:spcBef>
+                <a:spcPts val="300"/>
+              </a:spcBef>
+              <a:defRPr sz="1100">
+                <a:solidFill>
+                  <a:srgbClr val="FFFFFF"/>
+                </a:solidFill>
+              </a:defRPr>
+            </a:pPr>
+            <a:r>
+              <a:t>• Vite + React frontend running efficiently on low-end tablets.</a:t>
+            </a:r>
+          </a:p>
+          <a:p>
+            <a:pPr>
+              <a:spcBef>
+                <a:spcPts val="300"/>
+              </a:spcBef>
+              <a:defRPr sz="1100">
+                <a:solidFill>
+                  <a:srgbClr val="FFFFFF"/>
+                </a:solidFill>
+              </a:defRPr>
+            </a:pPr>
+            <a:r>
+              <a:t>• Offline-first IndexedDB delta sync requires zero extra hardware.</a:t>
+            </a:r>
+          </a:p>
+          <a:p>
+            <a:pPr>
+              <a:spcBef>
+                <a:spcPts val="300"/>
+              </a:spcBef>
+              <a:defRPr sz="1100">
+                <a:solidFill>
+                  <a:srgbClr val="FFFFFF"/>
+                </a:solidFill>
+              </a:defRPr>
+            </a:pPr>
+            <a:r>
+              <a:t>• Fast MILP convergence (&lt;500ms for 150 PHCs).</a:t>
+            </a:r>
+          </a:p>
+        </p:txBody>
+      </p:sp>
+      <p:sp>
+        <p:nvSpPr>
+          <p:cNvPr id="9" name="Rounded Rectangle 8"/>
+          <p:cNvSpPr/>
+          <p:nvPr/>
+        </p:nvSpPr>
+        <p:spPr>
+          <a:xfrm>
+            <a:off x="731520" y="3931920"/>
+            <a:ext cx="5120640" cy="2011680"/>
           </a:xfrm>
           <a:prstGeom prst="roundRect">
             <a:avLst/>
@@ -7312,14 +8725,14 @@
       </p:sp>
       <p:sp>
         <p:nvSpPr>
-          <p:cNvPr id="8" name="TextBox 7"/>
+          <p:cNvPr id="10" name="TextBox 9"/>
           <p:cNvSpPr txBox="1"/>
           <p:nvPr/>
         </p:nvSpPr>
         <p:spPr>
           <a:xfrm>
-            <a:off x="6400800" y="1828800"/>
-            <a:ext cx="4846320" cy="4023360"/>
+            <a:off x="914400" y="4069080"/>
+            <a:ext cx="4754880" cy="1737360"/>
           </a:xfrm>
           <a:prstGeom prst="rect">
             <a:avLst/>
@@ -7333,230 +8746,750 @@
           <a:lstStyle/>
           <a:p>
             <a:pPr>
-              <a:defRPr sz="1800" b="1">
+              <a:defRPr sz="1500" b="1">
                 <a:solidFill>
                   <a:srgbClr val="EA580C"/>
                 </a:solidFill>
               </a:defRPr>
             </a:pPr>
             <a:r>
-              <a:t>🔗 Source Links &amp; Live Portal Access</a:t>
-            </a:r>
-          </a:p>
-          <a:p>
-            <a:pPr>
-              <a:spcBef>
-                <a:spcPts val="400"/>
-              </a:spcBef>
+              <a:t>💰 Economic Feasibility</a:t>
+            </a:r>
+          </a:p>
+          <a:p>
+            <a:pPr>
+              <a:spcBef>
+                <a:spcPts val="300"/>
+              </a:spcBef>
+              <a:defRPr sz="1100">
+                <a:solidFill>
+                  <a:srgbClr val="FFFFFF"/>
+                </a:solidFill>
+              </a:defRPr>
+            </a:pPr>
+            <a:r>
+              <a:t>• 100% Open Source tech stack (zero proprietary license fees).</a:t>
+            </a:r>
+          </a:p>
+          <a:p>
+            <a:pPr>
+              <a:spcBef>
+                <a:spcPts val="300"/>
+              </a:spcBef>
+              <a:defRPr sz="1100">
+                <a:solidFill>
+                  <a:srgbClr val="FFFFFF"/>
+                </a:solidFill>
+              </a:defRPr>
+            </a:pPr>
+            <a:r>
+              <a:t>• Saves crores in expired medicine waste annually.</a:t>
+            </a:r>
+          </a:p>
+          <a:p>
+            <a:pPr>
+              <a:spcBef>
+                <a:spcPts val="300"/>
+              </a:spcBef>
+              <a:defRPr sz="1100">
+                <a:solidFill>
+                  <a:srgbClr val="FFFFFF"/>
+                </a:solidFill>
+              </a:defRPr>
+            </a:pPr>
+            <a:r>
+              <a:t>• Reduces emergency commercial spot purchasing costs.</a:t>
+            </a:r>
+          </a:p>
+          <a:p>
+            <a:pPr>
+              <a:spcBef>
+                <a:spcPts val="300"/>
+              </a:spcBef>
+              <a:defRPr sz="1100">
+                <a:solidFill>
+                  <a:srgbClr val="FFFFFF"/>
+                </a:solidFill>
+              </a:defRPr>
+            </a:pPr>
+            <a:r>
+              <a:t>• Utilizes existing rural PHC computer/smartphone infrastructure.</a:t>
+            </a:r>
+          </a:p>
+        </p:txBody>
+      </p:sp>
+      <p:sp>
+        <p:nvSpPr>
+          <p:cNvPr id="11" name="Rounded Rectangle 10"/>
+          <p:cNvSpPr/>
+          <p:nvPr/>
+        </p:nvSpPr>
+        <p:spPr>
+          <a:xfrm>
+            <a:off x="6126480" y="3931920"/>
+            <a:ext cx="5120640" cy="2011680"/>
+          </a:xfrm>
+          <a:prstGeom prst="roundRect">
+            <a:avLst/>
+          </a:prstGeom>
+          <a:solidFill>
+            <a:srgbClr val="1E293B"/>
+          </a:solidFill>
+          <a:ln w="19050">
+            <a:solidFill>
+              <a:srgbClr val="EA580C"/>
+            </a:solidFill>
+          </a:ln>
+        </p:spPr>
+        <p:style>
+          <a:lnRef idx="1">
+            <a:schemeClr val="accent1"/>
+          </a:lnRef>
+          <a:fillRef idx="3">
+            <a:schemeClr val="accent1"/>
+          </a:fillRef>
+          <a:effectRef idx="2">
+            <a:schemeClr val="accent1"/>
+          </a:effectRef>
+          <a:fontRef idx="minor">
+            <a:schemeClr val="lt1"/>
+          </a:fontRef>
+        </p:style>
+        <p:txBody>
+          <a:bodyPr rtlCol="0" anchor="ctr"/>
+          <a:lstStyle/>
+          <a:p>
+            <a:pPr algn="ctr"/>
+          </a:p>
+        </p:txBody>
+      </p:sp>
+      <p:sp>
+        <p:nvSpPr>
+          <p:cNvPr id="12" name="TextBox 11"/>
+          <p:cNvSpPr txBox="1"/>
+          <p:nvPr/>
+        </p:nvSpPr>
+        <p:spPr>
+          <a:xfrm>
+            <a:off x="6309360" y="4069080"/>
+            <a:ext cx="4754880" cy="1737360"/>
+          </a:xfrm>
+          <a:prstGeom prst="rect">
+            <a:avLst/>
+          </a:prstGeom>
+          <a:noFill/>
+        </p:spPr>
+        <p:txBody>
+          <a:bodyPr wrap="square">
+            <a:spAutoFit/>
+          </a:bodyPr>
+          <a:lstStyle/>
+          <a:p>
+            <a:pPr>
+              <a:defRPr sz="1500" b="1">
+                <a:solidFill>
+                  <a:srgbClr val="EA580C"/>
+                </a:solidFill>
+              </a:defRPr>
+            </a:pPr>
+            <a:r>
+              <a:t>📜 Regulatory &amp; Compliance</a:t>
+            </a:r>
+          </a:p>
+          <a:p>
+            <a:pPr>
+              <a:spcBef>
+                <a:spcPts val="300"/>
+              </a:spcBef>
+              <a:defRPr sz="1100">
+                <a:solidFill>
+                  <a:srgbClr val="FFFFFF"/>
+                </a:solidFill>
+              </a:defRPr>
+            </a:pPr>
+            <a:r>
+              <a:t>• Complies with DPDP Act 2023 &amp; DISHA privacy standards.</a:t>
+            </a:r>
+          </a:p>
+          <a:p>
+            <a:pPr>
+              <a:spcBef>
+                <a:spcPts val="300"/>
+              </a:spcBef>
+              <a:defRPr sz="1100">
+                <a:solidFill>
+                  <a:srgbClr val="FFFFFF"/>
+                </a:solidFill>
+              </a:defRPr>
+            </a:pPr>
+            <a:r>
+              <a:t>• Human-in-the-loop: CMOs retain full authority over approvals.</a:t>
+            </a:r>
+          </a:p>
+          <a:p>
+            <a:pPr>
+              <a:spcBef>
+                <a:spcPts val="300"/>
+              </a:spcBef>
+              <a:defRPr sz="1100">
+                <a:solidFill>
+                  <a:srgbClr val="FFFFFF"/>
+                </a:solidFill>
+              </a:defRPr>
+            </a:pPr>
+            <a:r>
+              <a:t>• ABDM Health Facility Registry &amp; M1/M2/M3 consent standards.</a:t>
+            </a:r>
+          </a:p>
+          <a:p>
+            <a:pPr>
+              <a:spcBef>
+                <a:spcPts val="300"/>
+              </a:spcBef>
+              <a:defRPr sz="1100">
+                <a:solidFill>
+                  <a:srgbClr val="FFFFFF"/>
+                </a:solidFill>
+              </a:defRPr>
+            </a:pPr>
+            <a:r>
+              <a:t>• eVIN cold-chain &amp; HMIS health data interoperability.</a:t>
+            </a:r>
+          </a:p>
+        </p:txBody>
+      </p:sp>
+    </p:spTree>
+  </p:cSld>
+  <p:clrMapOvr>
+    <a:masterClrMapping/>
+  </p:clrMapOvr>
+</p:sld>
+</file>
+
+<file path=ppt/slides/slide9.xml><?xml version="1.0" encoding="utf-8"?>
+<p:sld xmlns:a="http://schemas.openxmlformats.org/drawingml/2006/main" xmlns:p="http://schemas.openxmlformats.org/presentationml/2006/main" xmlns:r="http://schemas.openxmlformats.org/officeDocument/2006/relationships">
+  <p:cSld>
+    <p:spTree>
+      <p:nvGrpSpPr>
+        <p:cNvPr id="1" name=""/>
+        <p:cNvGrpSpPr/>
+        <p:nvPr/>
+      </p:nvGrpSpPr>
+      <p:grpSpPr/>
+      <p:sp>
+        <p:nvSpPr>
+          <p:cNvPr id="2" name="Rectangle 1"/>
+          <p:cNvSpPr/>
+          <p:nvPr/>
+        </p:nvSpPr>
+        <p:spPr>
+          <a:xfrm>
+            <a:off x="0" y="0"/>
+            <a:ext cx="12191695" cy="6858000"/>
+          </a:xfrm>
+          <a:prstGeom prst="rect">
+            <a:avLst/>
+          </a:prstGeom>
+          <a:solidFill>
+            <a:srgbClr val="0F172A"/>
+          </a:solidFill>
+          <a:ln>
+            <a:noFill/>
+          </a:ln>
+        </p:spPr>
+        <p:style>
+          <a:lnRef idx="1">
+            <a:schemeClr val="accent1"/>
+          </a:lnRef>
+          <a:fillRef idx="3">
+            <a:schemeClr val="accent1"/>
+          </a:fillRef>
+          <a:effectRef idx="2">
+            <a:schemeClr val="accent1"/>
+          </a:effectRef>
+          <a:fontRef idx="minor">
+            <a:schemeClr val="lt1"/>
+          </a:fontRef>
+        </p:style>
+        <p:txBody>
+          <a:bodyPr rtlCol="0" anchor="ctr"/>
+          <a:lstStyle/>
+          <a:p>
+            <a:pPr algn="ctr"/>
+          </a:p>
+        </p:txBody>
+      </p:sp>
+      <p:sp>
+        <p:nvSpPr>
+          <p:cNvPr id="3" name="TextBox 2"/>
+          <p:cNvSpPr txBox="1"/>
+          <p:nvPr/>
+        </p:nvSpPr>
+        <p:spPr>
+          <a:xfrm>
+            <a:off x="731520" y="365760"/>
+            <a:ext cx="10698480" cy="365760"/>
+          </a:xfrm>
+          <a:prstGeom prst="rect">
+            <a:avLst/>
+          </a:prstGeom>
+          <a:noFill/>
+        </p:spPr>
+        <p:txBody>
+          <a:bodyPr wrap="square">
+            <a:spAutoFit/>
+          </a:bodyPr>
+          <a:lstStyle/>
+          <a:p>
+            <a:pPr>
               <a:defRPr sz="1100" b="1">
                 <a:solidFill>
-                  <a:srgbClr val="FFFFFF"/>
-                </a:solidFill>
-              </a:defRPr>
-            </a:pPr>
-            <a:r>
-              <a:t>• GitHub Repository:</a:t>
-            </a:r>
-          </a:p>
-          <a:p>
-            <a:pPr>
-              <a:defRPr sz="1000">
+                  <a:srgbClr val="EA580C"/>
+                </a:solidFill>
+              </a:defRPr>
+            </a:pPr>
+            <a:r>
+              <a:t>SCOPE &amp; IMPACT</a:t>
+            </a:r>
+          </a:p>
+        </p:txBody>
+      </p:sp>
+      <p:sp>
+        <p:nvSpPr>
+          <p:cNvPr id="4" name="TextBox 3"/>
+          <p:cNvSpPr txBox="1"/>
+          <p:nvPr/>
+        </p:nvSpPr>
+        <p:spPr>
+          <a:xfrm>
+            <a:off x="731520" y="640080"/>
+            <a:ext cx="10698480" cy="731520"/>
+          </a:xfrm>
+          <a:prstGeom prst="rect">
+            <a:avLst/>
+          </a:prstGeom>
+          <a:noFill/>
+        </p:spPr>
+        <p:txBody>
+          <a:bodyPr wrap="square">
+            <a:spAutoFit/>
+          </a:bodyPr>
+          <a:lstStyle/>
+          <a:p>
+            <a:pPr>
+              <a:defRPr sz="2400" b="1">
+                <a:solidFill>
+                  <a:srgbClr val="FFFFFF"/>
+                </a:solidFill>
+              </a:defRPr>
+            </a:pPr>
+            <a:r>
+              <a:t>Project Scope, Impact Metrics &amp; Scaling Roadmap</a:t>
+            </a:r>
+          </a:p>
+        </p:txBody>
+      </p:sp>
+      <p:sp>
+        <p:nvSpPr>
+          <p:cNvPr id="5" name="Rounded Rectangle 4"/>
+          <p:cNvSpPr/>
+          <p:nvPr/>
+        </p:nvSpPr>
+        <p:spPr>
+          <a:xfrm>
+            <a:off x="731520" y="1645920"/>
+            <a:ext cx="10698480" cy="1325880"/>
+          </a:xfrm>
+          <a:prstGeom prst="roundRect">
+            <a:avLst/>
+          </a:prstGeom>
+          <a:solidFill>
+            <a:srgbClr val="1E293B"/>
+          </a:solidFill>
+          <a:ln w="19050">
+            <a:solidFill>
+              <a:srgbClr val="16A34A"/>
+            </a:solidFill>
+          </a:ln>
+        </p:spPr>
+        <p:style>
+          <a:lnRef idx="1">
+            <a:schemeClr val="accent1"/>
+          </a:lnRef>
+          <a:fillRef idx="3">
+            <a:schemeClr val="accent1"/>
+          </a:fillRef>
+          <a:effectRef idx="2">
+            <a:schemeClr val="accent1"/>
+          </a:effectRef>
+          <a:fontRef idx="minor">
+            <a:schemeClr val="lt1"/>
+          </a:fontRef>
+        </p:style>
+        <p:txBody>
+          <a:bodyPr rtlCol="0" anchor="ctr"/>
+          <a:lstStyle/>
+          <a:p>
+            <a:pPr algn="ctr"/>
+          </a:p>
+        </p:txBody>
+      </p:sp>
+      <p:sp>
+        <p:nvSpPr>
+          <p:cNvPr id="6" name="TextBox 5"/>
+          <p:cNvSpPr txBox="1"/>
+          <p:nvPr/>
+        </p:nvSpPr>
+        <p:spPr>
+          <a:xfrm>
+            <a:off x="960120" y="1755648"/>
+            <a:ext cx="10241280" cy="1097280"/>
+          </a:xfrm>
+          <a:prstGeom prst="rect">
+            <a:avLst/>
+          </a:prstGeom>
+          <a:noFill/>
+        </p:spPr>
+        <p:txBody>
+          <a:bodyPr wrap="square">
+            <a:spAutoFit/>
+          </a:bodyPr>
+          <a:lstStyle/>
+          <a:p>
+            <a:pPr>
+              <a:defRPr sz="1500" b="1">
                 <a:solidFill>
                   <a:srgbClr val="16A34A"/>
                 </a:solidFill>
               </a:defRPr>
             </a:pPr>
             <a:r>
-              <a:t>  https://github.com/rudraa0604/Swasthya-Setu-AI</a:t>
-            </a:r>
-          </a:p>
-          <a:p>
-            <a:pPr>
-              <a:spcBef>
-                <a:spcPts val="400"/>
-              </a:spcBef>
-              <a:defRPr sz="1100" b="1">
-                <a:solidFill>
-                  <a:srgbClr val="FFFFFF"/>
-                </a:solidFill>
-              </a:defRPr>
-            </a:pPr>
-            <a:r>
-              <a:t>• Local Web App Port:</a:t>
-            </a:r>
-          </a:p>
-          <a:p>
-            <a:pPr>
-              <a:defRPr sz="1000">
-                <a:solidFill>
-                  <a:srgbClr val="16A34A"/>
-                </a:solidFill>
-              </a:defRPr>
-            </a:pPr>
-            <a:r>
-              <a:t>  http://localhost:3000</a:t>
-            </a:r>
-          </a:p>
-          <a:p>
-            <a:pPr>
-              <a:spcBef>
-                <a:spcPts val="400"/>
-              </a:spcBef>
-              <a:defRPr sz="1100" b="1">
-                <a:solidFill>
-                  <a:srgbClr val="FFFFFF"/>
-                </a:solidFill>
-              </a:defRPr>
-            </a:pPr>
-            <a:r>
-              <a:t>• Backend FastAPI Docs:</a:t>
-            </a:r>
-          </a:p>
-          <a:p>
-            <a:pPr>
-              <a:defRPr sz="1000">
-                <a:solidFill>
-                  <a:srgbClr val="16A34A"/>
-                </a:solidFill>
-              </a:defRPr>
-            </a:pPr>
-            <a:r>
-              <a:t>  http://localhost:8000/docs</a:t>
-            </a:r>
-          </a:p>
-          <a:p>
-            <a:pPr>
-              <a:spcBef>
-                <a:spcPts val="400"/>
-              </a:spcBef>
-              <a:defRPr sz="1100" b="1">
-                <a:solidFill>
-                  <a:srgbClr val="FFFFFF"/>
-                </a:solidFill>
-              </a:defRPr>
-            </a:pPr>
-            <a:r>
-              <a:t>• National Overwatch Portal:</a:t>
-            </a:r>
-          </a:p>
-          <a:p>
-            <a:pPr>
-              <a:defRPr sz="1000">
-                <a:solidFill>
-                  <a:srgbClr val="16A34A"/>
-                </a:solidFill>
-              </a:defRPr>
-            </a:pPr>
-            <a:r>
-              <a:t>  http://localhost:3000/#/portal/national</a:t>
-            </a:r>
-          </a:p>
-          <a:p>
-            <a:pPr>
-              <a:spcBef>
-                <a:spcPts val="400"/>
-              </a:spcBef>
-              <a:defRPr sz="1100" b="1">
-                <a:solidFill>
-                  <a:srgbClr val="FFFFFF"/>
-                </a:solidFill>
-              </a:defRPr>
-            </a:pPr>
-            <a:r>
-              <a:t>• State Directorate Portal:</a:t>
-            </a:r>
-          </a:p>
-          <a:p>
-            <a:pPr>
-              <a:defRPr sz="1000">
-                <a:solidFill>
-                  <a:srgbClr val="16A34A"/>
-                </a:solidFill>
-              </a:defRPr>
-            </a:pPr>
-            <a:r>
-              <a:t>  http://localhost:3000/#/portal/state</a:t>
-            </a:r>
-          </a:p>
-          <a:p>
-            <a:pPr>
-              <a:spcBef>
-                <a:spcPts val="400"/>
-              </a:spcBef>
-              <a:defRPr sz="1100" b="1">
-                <a:solidFill>
-                  <a:srgbClr val="FFFFFF"/>
-                </a:solidFill>
-              </a:defRPr>
-            </a:pPr>
-            <a:r>
-              <a:t>• District Health Officer Portal:</a:t>
-            </a:r>
-          </a:p>
-          <a:p>
-            <a:pPr>
-              <a:defRPr sz="1000">
-                <a:solidFill>
-                  <a:srgbClr val="16A34A"/>
-                </a:solidFill>
-              </a:defRPr>
-            </a:pPr>
-            <a:r>
-              <a:t>  http://localhost:3000/#/portal/district</a:t>
-            </a:r>
-          </a:p>
-          <a:p>
-            <a:pPr>
-              <a:spcBef>
-                <a:spcPts val="400"/>
-              </a:spcBef>
-              <a:defRPr sz="1100" b="1">
-                <a:solidFill>
-                  <a:srgbClr val="FFFFFF"/>
-                </a:solidFill>
-              </a:defRPr>
-            </a:pPr>
-            <a:r>
-              <a:t>• Rural PHC Edge Terminal:</a:t>
-            </a:r>
-          </a:p>
-          <a:p>
-            <a:pPr>
-              <a:defRPr sz="1000">
-                <a:solidFill>
-                  <a:srgbClr val="16A34A"/>
-                </a:solidFill>
-              </a:defRPr>
-            </a:pPr>
-            <a:r>
-              <a:t>  http://localhost:3000/#/portal/edge</a:t>
-            </a:r>
-          </a:p>
-          <a:p>
-            <a:pPr>
-              <a:spcBef>
-                <a:spcPts val="400"/>
-              </a:spcBef>
-              <a:defRPr sz="1100" b="1">
-                <a:solidFill>
-                  <a:srgbClr val="FFFFFF"/>
-                </a:solidFill>
-              </a:defRPr>
-            </a:pPr>
-            <a:r>
-              <a:t>• AI Route &amp; Transit Optimizer:</a:t>
-            </a:r>
-          </a:p>
-          <a:p>
-            <a:pPr>
-              <a:defRPr sz="1000">
-                <a:solidFill>
-                  <a:srgbClr val="16A34A"/>
-                </a:solidFill>
-              </a:defRPr>
-            </a:pPr>
-            <a:r>
-              <a:t>  http://localhost:3000/#/portal/routes</a:t>
+              <a:t>📍 Phase 1: District Pilot (Completed &amp; Verified)</a:t>
+            </a:r>
+          </a:p>
+          <a:p>
+            <a:pPr>
+              <a:spcBef>
+                <a:spcPts val="200"/>
+              </a:spcBef>
+              <a:defRPr sz="1100">
+                <a:solidFill>
+                  <a:srgbClr val="FFFFFF"/>
+                </a:solidFill>
+              </a:defRPr>
+            </a:pPr>
+            <a:r>
+              <a:t>• 150 PHCs seeded across 15 districts (Maharashtra, Karnataka, UP).</a:t>
+            </a:r>
+          </a:p>
+          <a:p>
+            <a:pPr>
+              <a:spcBef>
+                <a:spcPts val="200"/>
+              </a:spcBef>
+              <a:defRPr sz="1100">
+                <a:solidFill>
+                  <a:srgbClr val="FFFFFF"/>
+                </a:solidFill>
+              </a:defRPr>
+            </a:pPr>
+            <a:r>
+              <a:t>• Full demand forecasting, PuLP redistribution, proximity radar &amp; hospital suite.</a:t>
+            </a:r>
+          </a:p>
+          <a:p>
+            <a:pPr>
+              <a:spcBef>
+                <a:spcPts val="200"/>
+              </a:spcBef>
+              <a:defRPr sz="1100">
+                <a:solidFill>
+                  <a:srgbClr val="FFFFFF"/>
+                </a:solidFill>
+              </a:defRPr>
+            </a:pPr>
+            <a:r>
+              <a:t>• Offline edge sync &amp; 11 Indian languages reactive translation engine.</a:t>
+            </a:r>
+          </a:p>
+        </p:txBody>
+      </p:sp>
+      <p:sp>
+        <p:nvSpPr>
+          <p:cNvPr id="7" name="Rounded Rectangle 6"/>
+          <p:cNvSpPr/>
+          <p:nvPr/>
+        </p:nvSpPr>
+        <p:spPr>
+          <a:xfrm>
+            <a:off x="731520" y="3154680"/>
+            <a:ext cx="10698480" cy="1325880"/>
+          </a:xfrm>
+          <a:prstGeom prst="roundRect">
+            <a:avLst/>
+          </a:prstGeom>
+          <a:solidFill>
+            <a:srgbClr val="1E293B"/>
+          </a:solidFill>
+          <a:ln w="19050">
+            <a:solidFill>
+              <a:srgbClr val="EA580C"/>
+            </a:solidFill>
+          </a:ln>
+        </p:spPr>
+        <p:style>
+          <a:lnRef idx="1">
+            <a:schemeClr val="accent1"/>
+          </a:lnRef>
+          <a:fillRef idx="3">
+            <a:schemeClr val="accent1"/>
+          </a:fillRef>
+          <a:effectRef idx="2">
+            <a:schemeClr val="accent1"/>
+          </a:effectRef>
+          <a:fontRef idx="minor">
+            <a:schemeClr val="lt1"/>
+          </a:fontRef>
+        </p:style>
+        <p:txBody>
+          <a:bodyPr rtlCol="0" anchor="ctr"/>
+          <a:lstStyle/>
+          <a:p>
+            <a:pPr algn="ctr"/>
+          </a:p>
+        </p:txBody>
+      </p:sp>
+      <p:sp>
+        <p:nvSpPr>
+          <p:cNvPr id="8" name="TextBox 7"/>
+          <p:cNvSpPr txBox="1"/>
+          <p:nvPr/>
+        </p:nvSpPr>
+        <p:spPr>
+          <a:xfrm>
+            <a:off x="960120" y="3264408"/>
+            <a:ext cx="10241280" cy="1097280"/>
+          </a:xfrm>
+          <a:prstGeom prst="rect">
+            <a:avLst/>
+          </a:prstGeom>
+          <a:noFill/>
+        </p:spPr>
+        <p:txBody>
+          <a:bodyPr wrap="square">
+            <a:spAutoFit/>
+          </a:bodyPr>
+          <a:lstStyle/>
+          <a:p>
+            <a:pPr>
+              <a:defRPr sz="1500" b="1">
+                <a:solidFill>
+                  <a:srgbClr val="EA580C"/>
+                </a:solidFill>
+              </a:defRPr>
+            </a:pPr>
+            <a:r>
+              <a:t>🏢 Phase 2: State-Wide Rollout (Next 6 Months)</a:t>
+            </a:r>
+          </a:p>
+          <a:p>
+            <a:pPr>
+              <a:spcBef>
+                <a:spcPts val="200"/>
+              </a:spcBef>
+              <a:defRPr sz="1100">
+                <a:solidFill>
+                  <a:srgbClr val="FFFFFF"/>
+                </a:solidFill>
+              </a:defRPr>
+            </a:pPr>
+            <a:r>
+              <a:t>• Integration with State Medical Services Corporations (e.g. MPMSCL, KMSCL).</a:t>
+            </a:r>
+          </a:p>
+          <a:p>
+            <a:pPr>
+              <a:spcBef>
+                <a:spcPts val="200"/>
+              </a:spcBef>
+              <a:defRPr sz="1100">
+                <a:solidFill>
+                  <a:srgbClr val="FFFFFF"/>
+                </a:solidFill>
+              </a:defRPr>
+            </a:pPr>
+            <a:r>
+              <a:t>• Automated GPS drone and courier dispatch integration.</a:t>
+            </a:r>
+          </a:p>
+          <a:p>
+            <a:pPr>
+              <a:spcBef>
+                <a:spcPts val="200"/>
+              </a:spcBef>
+              <a:defRPr sz="1100">
+                <a:solidFill>
+                  <a:srgbClr val="FFFFFF"/>
+                </a:solidFill>
+              </a:defRPr>
+            </a:pPr>
+            <a:r>
+              <a:t>• Real-time eVIN cold-chain temperature sensor streaming.</a:t>
+            </a:r>
+          </a:p>
+          <a:p>
+            <a:pPr>
+              <a:spcBef>
+                <a:spcPts val="200"/>
+              </a:spcBef>
+              <a:defRPr sz="1100">
+                <a:solidFill>
+                  <a:srgbClr val="FFFFFF"/>
+                </a:solidFill>
+              </a:defRPr>
+            </a:pPr>
+            <a:r>
+              <a:t>• Hospital Resource Optimizer pilot in district civil hospitals.</a:t>
+            </a:r>
+          </a:p>
+        </p:txBody>
+      </p:sp>
+      <p:sp>
+        <p:nvSpPr>
+          <p:cNvPr id="9" name="Rounded Rectangle 8"/>
+          <p:cNvSpPr/>
+          <p:nvPr/>
+        </p:nvSpPr>
+        <p:spPr>
+          <a:xfrm>
+            <a:off x="731520" y="4663440"/>
+            <a:ext cx="10698480" cy="1325880"/>
+          </a:xfrm>
+          <a:prstGeom prst="roundRect">
+            <a:avLst/>
+          </a:prstGeom>
+          <a:solidFill>
+            <a:srgbClr val="1E293B"/>
+          </a:solidFill>
+          <a:ln w="19050">
+            <a:solidFill>
+              <a:srgbClr val="FFFFFF"/>
+            </a:solidFill>
+          </a:ln>
+        </p:spPr>
+        <p:style>
+          <a:lnRef idx="1">
+            <a:schemeClr val="accent1"/>
+          </a:lnRef>
+          <a:fillRef idx="3">
+            <a:schemeClr val="accent1"/>
+          </a:fillRef>
+          <a:effectRef idx="2">
+            <a:schemeClr val="accent1"/>
+          </a:effectRef>
+          <a:fontRef idx="minor">
+            <a:schemeClr val="lt1"/>
+          </a:fontRef>
+        </p:style>
+        <p:txBody>
+          <a:bodyPr rtlCol="0" anchor="ctr"/>
+          <a:lstStyle/>
+          <a:p>
+            <a:pPr algn="ctr"/>
+          </a:p>
+        </p:txBody>
+      </p:sp>
+      <p:sp>
+        <p:nvSpPr>
+          <p:cNvPr id="10" name="TextBox 9"/>
+          <p:cNvSpPr txBox="1"/>
+          <p:nvPr/>
+        </p:nvSpPr>
+        <p:spPr>
+          <a:xfrm>
+            <a:off x="960120" y="4773168"/>
+            <a:ext cx="10241280" cy="1097280"/>
+          </a:xfrm>
+          <a:prstGeom prst="rect">
+            <a:avLst/>
+          </a:prstGeom>
+          <a:noFill/>
+        </p:spPr>
+        <p:txBody>
+          <a:bodyPr wrap="square">
+            <a:spAutoFit/>
+          </a:bodyPr>
+          <a:lstStyle/>
+          <a:p>
+            <a:pPr>
+              <a:defRPr sz="1500" b="1">
+                <a:solidFill>
+                  <a:srgbClr val="FFFFFF"/>
+                </a:solidFill>
+              </a:defRPr>
+            </a:pPr>
+            <a:r>
+              <a:t>🌐 Phase 3: National Scale (Next 12-24 Months)</a:t>
+            </a:r>
+          </a:p>
+          <a:p>
+            <a:pPr>
+              <a:spcBef>
+                <a:spcPts val="200"/>
+              </a:spcBef>
+              <a:defRPr sz="1100">
+                <a:solidFill>
+                  <a:srgbClr val="FFFFFF"/>
+                </a:solidFill>
+              </a:defRPr>
+            </a:pPr>
+            <a:r>
+              <a:t>• Pan-India scaling across 25,000+ PHCs &amp; 5,000+ CHCs.</a:t>
+            </a:r>
+          </a:p>
+          <a:p>
+            <a:pPr>
+              <a:spcBef>
+                <a:spcPts val="200"/>
+              </a:spcBef>
+              <a:defRPr sz="1100">
+                <a:solidFill>
+                  <a:srgbClr val="FFFFFF"/>
+                </a:solidFill>
+              </a:defRPr>
+            </a:pPr>
+            <a:r>
+              <a:t>• Full ABDM Unified Health Interface (UHI) interoperability.</a:t>
+            </a:r>
+          </a:p>
+          <a:p>
+            <a:pPr>
+              <a:spcBef>
+                <a:spcPts val="200"/>
+              </a:spcBef>
+              <a:defRPr sz="1100">
+                <a:solidFill>
+                  <a:srgbClr val="FFFFFF"/>
+                </a:solidFill>
+              </a:defRPr>
+            </a:pPr>
+            <a:r>
+              <a:t>• Cross-state emergency pharmaceutical disaster corridors.</a:t>
+            </a:r>
+          </a:p>
+          <a:p>
+            <a:pPr>
+              <a:spcBef>
+                <a:spcPts val="200"/>
+              </a:spcBef>
+              <a:defRPr sz="1100">
+                <a:solidFill>
+                  <a:srgbClr val="FFFFFF"/>
+                </a:solidFill>
+              </a:defRPr>
+            </a:pPr>
+            <a:r>
+              <a:t>• Hospital-level RL agents and cross-hospital federated learning.</a:t>
             </a:r>
           </a:p>
         </p:txBody>
